--- a/host/Splunk/Training Cell - Conversion course - Splunk.pptx
+++ b/host/Splunk/Training Cell - Conversion course - Splunk.pptx
@@ -4,6 +4,9 @@
   <p:sldMasterIdLst>
     <p:sldMasterId id="2147483648" r:id="rId1"/>
   </p:sldMasterIdLst>
+  <p:notesMasterIdLst>
+    <p:notesMasterId r:id="rId14"/>
+  </p:notesMasterIdLst>
   <p:sldIdLst>
     <p:sldId id="256" r:id="rId2"/>
     <p:sldId id="257" r:id="rId3"/>
@@ -11,21 +14,12 @@
     <p:sldId id="269" r:id="rId5"/>
     <p:sldId id="259" r:id="rId6"/>
     <p:sldId id="270" r:id="rId7"/>
-    <p:sldId id="271" r:id="rId8"/>
-    <p:sldId id="272" r:id="rId9"/>
-    <p:sldId id="273" r:id="rId10"/>
-    <p:sldId id="274" r:id="rId11"/>
-    <p:sldId id="260" r:id="rId12"/>
-    <p:sldId id="275" r:id="rId13"/>
-    <p:sldId id="276" r:id="rId14"/>
-    <p:sldId id="277" r:id="rId15"/>
-    <p:sldId id="278" r:id="rId16"/>
-    <p:sldId id="279" r:id="rId17"/>
-    <p:sldId id="280" r:id="rId18"/>
-    <p:sldId id="281" r:id="rId19"/>
-    <p:sldId id="261" r:id="rId20"/>
-    <p:sldId id="263" r:id="rId21"/>
-    <p:sldId id="282" r:id="rId22"/>
+    <p:sldId id="272" r:id="rId8"/>
+    <p:sldId id="260" r:id="rId9"/>
+    <p:sldId id="275" r:id="rId10"/>
+    <p:sldId id="277" r:id="rId11"/>
+    <p:sldId id="279" r:id="rId12"/>
+    <p:sldId id="261" r:id="rId13"/>
   </p:sldIdLst>
   <p:sldSz cx="12192000" cy="6858000"/>
   <p:notesSz cx="6858000" cy="9144000"/>
@@ -132,6 +126,1316 @@
 </p:presentation>
 </file>
 
+<file path=ppt/notesMasters/notesMaster1.xml><?xml version="1.0" encoding="utf-8"?>
+<p:notesMaster xmlns:a="http://schemas.openxmlformats.org/drawingml/2006/main" xmlns:r="http://schemas.openxmlformats.org/officeDocument/2006/relationships" xmlns:p="http://schemas.openxmlformats.org/presentationml/2006/main">
+  <p:cSld>
+    <p:bg>
+      <p:bgRef idx="1001">
+        <a:schemeClr val="bg1"/>
+      </p:bgRef>
+    </p:bg>
+    <p:spTree>
+      <p:nvGrpSpPr>
+        <p:cNvPr id="1" name=""/>
+        <p:cNvGrpSpPr/>
+        <p:nvPr/>
+      </p:nvGrpSpPr>
+      <p:grpSpPr>
+        <a:xfrm>
+          <a:off x="0" y="0"/>
+          <a:ext cx="0" cy="0"/>
+          <a:chOff x="0" y="0"/>
+          <a:chExt cx="0" cy="0"/>
+        </a:xfrm>
+      </p:grpSpPr>
+      <p:sp>
+        <p:nvSpPr>
+          <p:cNvPr id="2" name="Header Placeholder 1"/>
+          <p:cNvSpPr>
+            <a:spLocks noGrp="1"/>
+          </p:cNvSpPr>
+          <p:nvPr>
+            <p:ph type="hdr" sz="quarter"/>
+          </p:nvPr>
+        </p:nvSpPr>
+        <p:spPr>
+          <a:xfrm>
+            <a:off x="0" y="0"/>
+            <a:ext cx="2971800" cy="458788"/>
+          </a:xfrm>
+          <a:prstGeom prst="rect">
+            <a:avLst/>
+          </a:prstGeom>
+        </p:spPr>
+        <p:txBody>
+          <a:bodyPr vert="horz" lIns="91440" tIns="45720" rIns="91440" bIns="45720" rtlCol="0"/>
+          <a:lstStyle>
+            <a:lvl1pPr algn="l">
+              <a:defRPr sz="1200"/>
+            </a:lvl1pPr>
+          </a:lstStyle>
+          <a:p>
+            <a:endParaRPr lang="en-AU"/>
+          </a:p>
+        </p:txBody>
+      </p:sp>
+      <p:sp>
+        <p:nvSpPr>
+          <p:cNvPr id="3" name="Date Placeholder 2"/>
+          <p:cNvSpPr>
+            <a:spLocks noGrp="1"/>
+          </p:cNvSpPr>
+          <p:nvPr>
+            <p:ph type="dt" idx="1"/>
+          </p:nvPr>
+        </p:nvSpPr>
+        <p:spPr>
+          <a:xfrm>
+            <a:off x="3884613" y="0"/>
+            <a:ext cx="2971800" cy="458788"/>
+          </a:xfrm>
+          <a:prstGeom prst="rect">
+            <a:avLst/>
+          </a:prstGeom>
+        </p:spPr>
+        <p:txBody>
+          <a:bodyPr vert="horz" lIns="91440" tIns="45720" rIns="91440" bIns="45720" rtlCol="0"/>
+          <a:lstStyle>
+            <a:lvl1pPr algn="r">
+              <a:defRPr sz="1200"/>
+            </a:lvl1pPr>
+          </a:lstStyle>
+          <a:p>
+            <a:fld id="{6D908D67-9536-4DD9-AEBE-83236953B92D}" type="datetimeFigureOut">
+              <a:rPr lang="en-AU" smtClean="0"/>
+              <a:t>13/04/2026</a:t>
+            </a:fld>
+            <a:endParaRPr lang="en-AU"/>
+          </a:p>
+        </p:txBody>
+      </p:sp>
+      <p:sp>
+        <p:nvSpPr>
+          <p:cNvPr id="4" name="Slide Image Placeholder 3"/>
+          <p:cNvSpPr>
+            <a:spLocks noGrp="1" noRot="1" noChangeAspect="1"/>
+          </p:cNvSpPr>
+          <p:nvPr>
+            <p:ph type="sldImg" idx="2"/>
+          </p:nvPr>
+        </p:nvSpPr>
+        <p:spPr>
+          <a:xfrm>
+            <a:off x="685800" y="1143000"/>
+            <a:ext cx="5486400" cy="3086100"/>
+          </a:xfrm>
+          <a:prstGeom prst="rect">
+            <a:avLst/>
+          </a:prstGeom>
+          <a:noFill/>
+          <a:ln w="12700">
+            <a:solidFill>
+              <a:prstClr val="black"/>
+            </a:solidFill>
+          </a:ln>
+        </p:spPr>
+        <p:txBody>
+          <a:bodyPr vert="horz" lIns="91440" tIns="45720" rIns="91440" bIns="45720" rtlCol="0" anchor="ctr"/>
+          <a:lstStyle/>
+          <a:p>
+            <a:endParaRPr lang="en-AU"/>
+          </a:p>
+        </p:txBody>
+      </p:sp>
+      <p:sp>
+        <p:nvSpPr>
+          <p:cNvPr id="5" name="Notes Placeholder 4"/>
+          <p:cNvSpPr>
+            <a:spLocks noGrp="1"/>
+          </p:cNvSpPr>
+          <p:nvPr>
+            <p:ph type="body" sz="quarter" idx="3"/>
+          </p:nvPr>
+        </p:nvSpPr>
+        <p:spPr>
+          <a:xfrm>
+            <a:off x="685800" y="4400550"/>
+            <a:ext cx="5486400" cy="3600450"/>
+          </a:xfrm>
+          <a:prstGeom prst="rect">
+            <a:avLst/>
+          </a:prstGeom>
+        </p:spPr>
+        <p:txBody>
+          <a:bodyPr vert="horz" lIns="91440" tIns="45720" rIns="91440" bIns="45720" rtlCol="0"/>
+          <a:lstStyle/>
+          <a:p>
+            <a:pPr lvl="0"/>
+            <a:r>
+              <a:rPr lang="en-US"/>
+              <a:t>Click to edit Master text styles</a:t>
+            </a:r>
+          </a:p>
+          <a:p>
+            <a:pPr lvl="1"/>
+            <a:r>
+              <a:rPr lang="en-US"/>
+              <a:t>Second level</a:t>
+            </a:r>
+          </a:p>
+          <a:p>
+            <a:pPr lvl="2"/>
+            <a:r>
+              <a:rPr lang="en-US"/>
+              <a:t>Third level</a:t>
+            </a:r>
+          </a:p>
+          <a:p>
+            <a:pPr lvl="3"/>
+            <a:r>
+              <a:rPr lang="en-US"/>
+              <a:t>Fourth level</a:t>
+            </a:r>
+          </a:p>
+          <a:p>
+            <a:pPr lvl="4"/>
+            <a:r>
+              <a:rPr lang="en-US"/>
+              <a:t>Fifth level</a:t>
+            </a:r>
+            <a:endParaRPr lang="en-AU"/>
+          </a:p>
+        </p:txBody>
+      </p:sp>
+      <p:sp>
+        <p:nvSpPr>
+          <p:cNvPr id="6" name="Footer Placeholder 5"/>
+          <p:cNvSpPr>
+            <a:spLocks noGrp="1"/>
+          </p:cNvSpPr>
+          <p:nvPr>
+            <p:ph type="ftr" sz="quarter" idx="4"/>
+          </p:nvPr>
+        </p:nvSpPr>
+        <p:spPr>
+          <a:xfrm>
+            <a:off x="0" y="8685213"/>
+            <a:ext cx="2971800" cy="458787"/>
+          </a:xfrm>
+          <a:prstGeom prst="rect">
+            <a:avLst/>
+          </a:prstGeom>
+        </p:spPr>
+        <p:txBody>
+          <a:bodyPr vert="horz" lIns="91440" tIns="45720" rIns="91440" bIns="45720" rtlCol="0" anchor="b"/>
+          <a:lstStyle>
+            <a:lvl1pPr algn="l">
+              <a:defRPr sz="1200"/>
+            </a:lvl1pPr>
+          </a:lstStyle>
+          <a:p>
+            <a:endParaRPr lang="en-AU"/>
+          </a:p>
+        </p:txBody>
+      </p:sp>
+      <p:sp>
+        <p:nvSpPr>
+          <p:cNvPr id="7" name="Slide Number Placeholder 6"/>
+          <p:cNvSpPr>
+            <a:spLocks noGrp="1"/>
+          </p:cNvSpPr>
+          <p:nvPr>
+            <p:ph type="sldNum" sz="quarter" idx="5"/>
+          </p:nvPr>
+        </p:nvSpPr>
+        <p:spPr>
+          <a:xfrm>
+            <a:off x="3884613" y="8685213"/>
+            <a:ext cx="2971800" cy="458787"/>
+          </a:xfrm>
+          <a:prstGeom prst="rect">
+            <a:avLst/>
+          </a:prstGeom>
+        </p:spPr>
+        <p:txBody>
+          <a:bodyPr vert="horz" lIns="91440" tIns="45720" rIns="91440" bIns="45720" rtlCol="0" anchor="b"/>
+          <a:lstStyle>
+            <a:lvl1pPr algn="r">
+              <a:defRPr sz="1200"/>
+            </a:lvl1pPr>
+          </a:lstStyle>
+          <a:p>
+            <a:fld id="{62F461C2-7142-42A3-A2AC-57CDC5960F55}" type="slidenum">
+              <a:rPr lang="en-AU" smtClean="0"/>
+              <a:t>‹#›</a:t>
+            </a:fld>
+            <a:endParaRPr lang="en-AU"/>
+          </a:p>
+        </p:txBody>
+      </p:sp>
+    </p:spTree>
+    <p:extLst>
+      <p:ext uri="{BB962C8B-B14F-4D97-AF65-F5344CB8AC3E}">
+        <p14:creationId xmlns:p14="http://schemas.microsoft.com/office/powerpoint/2010/main" val="3108208654"/>
+      </p:ext>
+    </p:extLst>
+  </p:cSld>
+  <p:clrMap bg1="lt1" tx1="dk1" bg2="lt2" tx2="dk2" accent1="accent1" accent2="accent2" accent3="accent3" accent4="accent4" accent5="accent5" accent6="accent6" hlink="hlink" folHlink="folHlink"/>
+  <p:notesStyle>
+    <a:lvl1pPr marL="0" algn="l" defTabSz="914400" rtl="0" eaLnBrk="1" latinLnBrk="0" hangingPunct="1">
+      <a:defRPr sz="1200" kern="1200">
+        <a:solidFill>
+          <a:schemeClr val="tx1"/>
+        </a:solidFill>
+        <a:latin typeface="+mn-lt"/>
+        <a:ea typeface="+mn-ea"/>
+        <a:cs typeface="+mn-cs"/>
+      </a:defRPr>
+    </a:lvl1pPr>
+    <a:lvl2pPr marL="457200" algn="l" defTabSz="914400" rtl="0" eaLnBrk="1" latinLnBrk="0" hangingPunct="1">
+      <a:defRPr sz="1200" kern="1200">
+        <a:solidFill>
+          <a:schemeClr val="tx1"/>
+        </a:solidFill>
+        <a:latin typeface="+mn-lt"/>
+        <a:ea typeface="+mn-ea"/>
+        <a:cs typeface="+mn-cs"/>
+      </a:defRPr>
+    </a:lvl2pPr>
+    <a:lvl3pPr marL="914400" algn="l" defTabSz="914400" rtl="0" eaLnBrk="1" latinLnBrk="0" hangingPunct="1">
+      <a:defRPr sz="1200" kern="1200">
+        <a:solidFill>
+          <a:schemeClr val="tx1"/>
+        </a:solidFill>
+        <a:latin typeface="+mn-lt"/>
+        <a:ea typeface="+mn-ea"/>
+        <a:cs typeface="+mn-cs"/>
+      </a:defRPr>
+    </a:lvl3pPr>
+    <a:lvl4pPr marL="1371600" algn="l" defTabSz="914400" rtl="0" eaLnBrk="1" latinLnBrk="0" hangingPunct="1">
+      <a:defRPr sz="1200" kern="1200">
+        <a:solidFill>
+          <a:schemeClr val="tx1"/>
+        </a:solidFill>
+        <a:latin typeface="+mn-lt"/>
+        <a:ea typeface="+mn-ea"/>
+        <a:cs typeface="+mn-cs"/>
+      </a:defRPr>
+    </a:lvl4pPr>
+    <a:lvl5pPr marL="1828800" algn="l" defTabSz="914400" rtl="0" eaLnBrk="1" latinLnBrk="0" hangingPunct="1">
+      <a:defRPr sz="1200" kern="1200">
+        <a:solidFill>
+          <a:schemeClr val="tx1"/>
+        </a:solidFill>
+        <a:latin typeface="+mn-lt"/>
+        <a:ea typeface="+mn-ea"/>
+        <a:cs typeface="+mn-cs"/>
+      </a:defRPr>
+    </a:lvl5pPr>
+    <a:lvl6pPr marL="2286000" algn="l" defTabSz="914400" rtl="0" eaLnBrk="1" latinLnBrk="0" hangingPunct="1">
+      <a:defRPr sz="1200" kern="1200">
+        <a:solidFill>
+          <a:schemeClr val="tx1"/>
+        </a:solidFill>
+        <a:latin typeface="+mn-lt"/>
+        <a:ea typeface="+mn-ea"/>
+        <a:cs typeface="+mn-cs"/>
+      </a:defRPr>
+    </a:lvl6pPr>
+    <a:lvl7pPr marL="2743200" algn="l" defTabSz="914400" rtl="0" eaLnBrk="1" latinLnBrk="0" hangingPunct="1">
+      <a:defRPr sz="1200" kern="1200">
+        <a:solidFill>
+          <a:schemeClr val="tx1"/>
+        </a:solidFill>
+        <a:latin typeface="+mn-lt"/>
+        <a:ea typeface="+mn-ea"/>
+        <a:cs typeface="+mn-cs"/>
+      </a:defRPr>
+    </a:lvl7pPr>
+    <a:lvl8pPr marL="3200400" algn="l" defTabSz="914400" rtl="0" eaLnBrk="1" latinLnBrk="0" hangingPunct="1">
+      <a:defRPr sz="1200" kern="1200">
+        <a:solidFill>
+          <a:schemeClr val="tx1"/>
+        </a:solidFill>
+        <a:latin typeface="+mn-lt"/>
+        <a:ea typeface="+mn-ea"/>
+        <a:cs typeface="+mn-cs"/>
+      </a:defRPr>
+    </a:lvl8pPr>
+    <a:lvl9pPr marL="3657600" algn="l" defTabSz="914400" rtl="0" eaLnBrk="1" latinLnBrk="0" hangingPunct="1">
+      <a:defRPr sz="1200" kern="1200">
+        <a:solidFill>
+          <a:schemeClr val="tx1"/>
+        </a:solidFill>
+        <a:latin typeface="+mn-lt"/>
+        <a:ea typeface="+mn-ea"/>
+        <a:cs typeface="+mn-cs"/>
+      </a:defRPr>
+    </a:lvl9pPr>
+  </p:notesStyle>
+</p:notesMaster>
+</file>
+
+<file path=ppt/notesSlides/notesSlide1.xml><?xml version="1.0" encoding="utf-8"?>
+<p:notes xmlns:a="http://schemas.openxmlformats.org/drawingml/2006/main" xmlns:r="http://schemas.openxmlformats.org/officeDocument/2006/relationships" xmlns:p="http://schemas.openxmlformats.org/presentationml/2006/main">
+  <p:cSld>
+    <p:spTree>
+      <p:nvGrpSpPr>
+        <p:cNvPr id="1" name=""/>
+        <p:cNvGrpSpPr/>
+        <p:nvPr/>
+      </p:nvGrpSpPr>
+      <p:grpSpPr>
+        <a:xfrm>
+          <a:off x="0" y="0"/>
+          <a:ext cx="0" cy="0"/>
+          <a:chOff x="0" y="0"/>
+          <a:chExt cx="0" cy="0"/>
+        </a:xfrm>
+      </p:grpSpPr>
+      <p:sp>
+        <p:nvSpPr>
+          <p:cNvPr id="2" name="Slide Image Placeholder 1"/>
+          <p:cNvSpPr>
+            <a:spLocks noGrp="1" noRot="1" noChangeAspect="1"/>
+          </p:cNvSpPr>
+          <p:nvPr>
+            <p:ph type="sldImg"/>
+          </p:nvPr>
+        </p:nvSpPr>
+        <p:spPr/>
+      </p:sp>
+      <p:sp>
+        <p:nvSpPr>
+          <p:cNvPr id="3" name="Notes Placeholder 2"/>
+          <p:cNvSpPr>
+            <a:spLocks noGrp="1"/>
+          </p:cNvSpPr>
+          <p:nvPr>
+            <p:ph type="body" idx="1"/>
+          </p:nvPr>
+        </p:nvSpPr>
+        <p:spPr/>
+        <p:txBody>
+          <a:bodyPr/>
+          <a:lstStyle/>
+          <a:p>
+            <a:r>
+              <a:rPr lang="en-US" dirty="0"/>
+              <a:t>Teacher notes:</a:t>
+            </a:r>
+          </a:p>
+          <a:p>
+            <a:endParaRPr lang="en-US" dirty="0"/>
+          </a:p>
+          <a:p>
+            <a:r>
+              <a:rPr lang="en-US" dirty="0"/>
+              <a:t>An index in Splunk is like a giant filing cabinet where all your data is stored, organized, and made searchable. It’s a way to categorize and organize your data so that Splunk can quickly find and retrieve it when you need it.</a:t>
+            </a:r>
+            <a:endParaRPr lang="en-AU" dirty="0"/>
+          </a:p>
+        </p:txBody>
+      </p:sp>
+      <p:sp>
+        <p:nvSpPr>
+          <p:cNvPr id="4" name="Slide Number Placeholder 3"/>
+          <p:cNvSpPr>
+            <a:spLocks noGrp="1"/>
+          </p:cNvSpPr>
+          <p:nvPr>
+            <p:ph type="sldNum" sz="quarter" idx="5"/>
+          </p:nvPr>
+        </p:nvSpPr>
+        <p:spPr/>
+        <p:txBody>
+          <a:bodyPr/>
+          <a:lstStyle/>
+          <a:p>
+            <a:fld id="{62F461C2-7142-42A3-A2AC-57CDC5960F55}" type="slidenum">
+              <a:rPr lang="en-AU" smtClean="0"/>
+              <a:t>3</a:t>
+            </a:fld>
+            <a:endParaRPr lang="en-AU"/>
+          </a:p>
+        </p:txBody>
+      </p:sp>
+    </p:spTree>
+    <p:extLst>
+      <p:ext uri="{BB962C8B-B14F-4D97-AF65-F5344CB8AC3E}">
+        <p14:creationId xmlns:p14="http://schemas.microsoft.com/office/powerpoint/2010/main" val="3161803539"/>
+      </p:ext>
+    </p:extLst>
+  </p:cSld>
+  <p:clrMapOvr>
+    <a:masterClrMapping/>
+  </p:clrMapOvr>
+</p:notes>
+</file>
+
+<file path=ppt/notesSlides/notesSlide2.xml><?xml version="1.0" encoding="utf-8"?>
+<p:notes xmlns:a="http://schemas.openxmlformats.org/drawingml/2006/main" xmlns:r="http://schemas.openxmlformats.org/officeDocument/2006/relationships" xmlns:p="http://schemas.openxmlformats.org/presentationml/2006/main">
+  <p:cSld>
+    <p:spTree>
+      <p:nvGrpSpPr>
+        <p:cNvPr id="1" name=""/>
+        <p:cNvGrpSpPr/>
+        <p:nvPr/>
+      </p:nvGrpSpPr>
+      <p:grpSpPr>
+        <a:xfrm>
+          <a:off x="0" y="0"/>
+          <a:ext cx="0" cy="0"/>
+          <a:chOff x="0" y="0"/>
+          <a:chExt cx="0" cy="0"/>
+        </a:xfrm>
+      </p:grpSpPr>
+      <p:sp>
+        <p:nvSpPr>
+          <p:cNvPr id="2" name="Slide Image Placeholder 1"/>
+          <p:cNvSpPr>
+            <a:spLocks noGrp="1" noRot="1" noChangeAspect="1"/>
+          </p:cNvSpPr>
+          <p:nvPr>
+            <p:ph type="sldImg"/>
+          </p:nvPr>
+        </p:nvSpPr>
+        <p:spPr/>
+      </p:sp>
+      <p:sp>
+        <p:nvSpPr>
+          <p:cNvPr id="3" name="Notes Placeholder 2"/>
+          <p:cNvSpPr>
+            <a:spLocks noGrp="1"/>
+          </p:cNvSpPr>
+          <p:nvPr>
+            <p:ph type="body" idx="1"/>
+          </p:nvPr>
+        </p:nvSpPr>
+        <p:spPr/>
+        <p:txBody>
+          <a:bodyPr/>
+          <a:lstStyle/>
+          <a:p>
+            <a:pPr marL="0" marR="0" lvl="0" indent="0" algn="l" defTabSz="914400" rtl="0" eaLnBrk="1" fontAlgn="auto" latinLnBrk="0" hangingPunct="1">
+              <a:lnSpc>
+                <a:spcPct val="100000"/>
+              </a:lnSpc>
+              <a:spcBef>
+                <a:spcPts val="0"/>
+              </a:spcBef>
+              <a:spcAft>
+                <a:spcPts val="0"/>
+              </a:spcAft>
+              <a:buClrTx/>
+              <a:buSzTx/>
+              <a:buFontTx/>
+              <a:buNone/>
+              <a:tabLst/>
+              <a:defRPr/>
+            </a:pPr>
+            <a:r>
+              <a:rPr lang="en-AU" dirty="0"/>
+              <a:t>Teacher Notes:</a:t>
+            </a:r>
+          </a:p>
+          <a:p>
+            <a:pPr marL="0" marR="0" lvl="0" indent="0" algn="l" defTabSz="914400" rtl="0" eaLnBrk="1" fontAlgn="auto" latinLnBrk="0" hangingPunct="1">
+              <a:lnSpc>
+                <a:spcPct val="100000"/>
+              </a:lnSpc>
+              <a:spcBef>
+                <a:spcPts val="0"/>
+              </a:spcBef>
+              <a:spcAft>
+                <a:spcPts val="0"/>
+              </a:spcAft>
+              <a:buClrTx/>
+              <a:buSzTx/>
+              <a:buFontTx/>
+              <a:buNone/>
+              <a:tabLst/>
+              <a:defRPr/>
+            </a:pPr>
+            <a:r>
+              <a:rPr lang="en-AU" dirty="0"/>
+              <a:t>- Explore spunk home page</a:t>
+            </a:r>
+          </a:p>
+          <a:p>
+            <a:pPr marL="0" marR="0" lvl="0" indent="0" algn="l" defTabSz="914400" rtl="0" eaLnBrk="1" fontAlgn="auto" latinLnBrk="0" hangingPunct="1">
+              <a:lnSpc>
+                <a:spcPct val="100000"/>
+              </a:lnSpc>
+              <a:spcBef>
+                <a:spcPts val="0"/>
+              </a:spcBef>
+              <a:spcAft>
+                <a:spcPts val="0"/>
+              </a:spcAft>
+              <a:buClrTx/>
+              <a:buSzTx/>
+              <a:buFontTx/>
+              <a:buNone/>
+              <a:tabLst/>
+              <a:defRPr/>
+            </a:pPr>
+            <a:r>
+              <a:rPr lang="en-AU" dirty="0"/>
+              <a:t>(index=* for demo only, use a specified index in production environment)</a:t>
+            </a:r>
+          </a:p>
+          <a:p>
+            <a:r>
+              <a:rPr lang="en-AU" dirty="0"/>
+              <a:t> </a:t>
+            </a:r>
+          </a:p>
+          <a:p>
+            <a:r>
+              <a:rPr lang="en-AU" dirty="0"/>
+              <a:t>Source types are like filters within the index</a:t>
+            </a:r>
+          </a:p>
+        </p:txBody>
+      </p:sp>
+      <p:sp>
+        <p:nvSpPr>
+          <p:cNvPr id="4" name="Slide Number Placeholder 3"/>
+          <p:cNvSpPr>
+            <a:spLocks noGrp="1"/>
+          </p:cNvSpPr>
+          <p:nvPr>
+            <p:ph type="sldNum" sz="quarter" idx="5"/>
+          </p:nvPr>
+        </p:nvSpPr>
+        <p:spPr/>
+        <p:txBody>
+          <a:bodyPr/>
+          <a:lstStyle/>
+          <a:p>
+            <a:fld id="{62F461C2-7142-42A3-A2AC-57CDC5960F55}" type="slidenum">
+              <a:rPr lang="en-AU" smtClean="0"/>
+              <a:t>4</a:t>
+            </a:fld>
+            <a:endParaRPr lang="en-AU"/>
+          </a:p>
+        </p:txBody>
+      </p:sp>
+    </p:spTree>
+    <p:extLst>
+      <p:ext uri="{BB962C8B-B14F-4D97-AF65-F5344CB8AC3E}">
+        <p14:creationId xmlns:p14="http://schemas.microsoft.com/office/powerpoint/2010/main" val="479526323"/>
+      </p:ext>
+    </p:extLst>
+  </p:cSld>
+  <p:clrMapOvr>
+    <a:masterClrMapping/>
+  </p:clrMapOvr>
+</p:notes>
+</file>
+
+<file path=ppt/notesSlides/notesSlide3.xml><?xml version="1.0" encoding="utf-8"?>
+<p:notes xmlns:a="http://schemas.openxmlformats.org/drawingml/2006/main" xmlns:r="http://schemas.openxmlformats.org/officeDocument/2006/relationships" xmlns:p="http://schemas.openxmlformats.org/presentationml/2006/main">
+  <p:cSld>
+    <p:spTree>
+      <p:nvGrpSpPr>
+        <p:cNvPr id="1" name=""/>
+        <p:cNvGrpSpPr/>
+        <p:nvPr/>
+      </p:nvGrpSpPr>
+      <p:grpSpPr>
+        <a:xfrm>
+          <a:off x="0" y="0"/>
+          <a:ext cx="0" cy="0"/>
+          <a:chOff x="0" y="0"/>
+          <a:chExt cx="0" cy="0"/>
+        </a:xfrm>
+      </p:grpSpPr>
+      <p:sp>
+        <p:nvSpPr>
+          <p:cNvPr id="2" name="Slide Image Placeholder 1"/>
+          <p:cNvSpPr>
+            <a:spLocks noGrp="1" noRot="1" noChangeAspect="1"/>
+          </p:cNvSpPr>
+          <p:nvPr>
+            <p:ph type="sldImg"/>
+          </p:nvPr>
+        </p:nvSpPr>
+        <p:spPr/>
+      </p:sp>
+      <p:sp>
+        <p:nvSpPr>
+          <p:cNvPr id="3" name="Notes Placeholder 2"/>
+          <p:cNvSpPr>
+            <a:spLocks noGrp="1"/>
+          </p:cNvSpPr>
+          <p:nvPr>
+            <p:ph type="body" idx="1"/>
+          </p:nvPr>
+        </p:nvSpPr>
+        <p:spPr/>
+        <p:txBody>
+          <a:bodyPr/>
+          <a:lstStyle/>
+          <a:p>
+            <a:r>
+              <a:rPr lang="en-US" dirty="0"/>
+              <a:t>Teacher Notes:</a:t>
+            </a:r>
+          </a:p>
+          <a:p>
+            <a:endParaRPr lang="en-US" dirty="0"/>
+          </a:p>
+          <a:p>
+            <a:r>
+              <a:rPr lang="en-US" dirty="0"/>
+              <a:t>Splunk allows you to create your own fields using regex</a:t>
+            </a:r>
+            <a:r>
+              <a:rPr lang="en-AU" dirty="0"/>
+              <a:t>, useful for grabbing information not already fielded or further filtering information</a:t>
+            </a:r>
+            <a:endParaRPr lang="en-US" dirty="0"/>
+          </a:p>
+        </p:txBody>
+      </p:sp>
+      <p:sp>
+        <p:nvSpPr>
+          <p:cNvPr id="4" name="Slide Number Placeholder 3"/>
+          <p:cNvSpPr>
+            <a:spLocks noGrp="1"/>
+          </p:cNvSpPr>
+          <p:nvPr>
+            <p:ph type="sldNum" sz="quarter" idx="5"/>
+          </p:nvPr>
+        </p:nvSpPr>
+        <p:spPr/>
+        <p:txBody>
+          <a:bodyPr/>
+          <a:lstStyle/>
+          <a:p>
+            <a:fld id="{62F461C2-7142-42A3-A2AC-57CDC5960F55}" type="slidenum">
+              <a:rPr lang="en-AU" smtClean="0"/>
+              <a:t>5</a:t>
+            </a:fld>
+            <a:endParaRPr lang="en-AU"/>
+          </a:p>
+        </p:txBody>
+      </p:sp>
+    </p:spTree>
+    <p:extLst>
+      <p:ext uri="{BB962C8B-B14F-4D97-AF65-F5344CB8AC3E}">
+        <p14:creationId xmlns:p14="http://schemas.microsoft.com/office/powerpoint/2010/main" val="2791111887"/>
+      </p:ext>
+    </p:extLst>
+  </p:cSld>
+  <p:clrMapOvr>
+    <a:masterClrMapping/>
+  </p:clrMapOvr>
+</p:notes>
+</file>
+
+<file path=ppt/notesSlides/notesSlide4.xml><?xml version="1.0" encoding="utf-8"?>
+<p:notes xmlns:a="http://schemas.openxmlformats.org/drawingml/2006/main" xmlns:r="http://schemas.openxmlformats.org/officeDocument/2006/relationships" xmlns:p="http://schemas.openxmlformats.org/presentationml/2006/main">
+  <p:cSld>
+    <p:spTree>
+      <p:nvGrpSpPr>
+        <p:cNvPr id="1" name=""/>
+        <p:cNvGrpSpPr/>
+        <p:nvPr/>
+      </p:nvGrpSpPr>
+      <p:grpSpPr>
+        <a:xfrm>
+          <a:off x="0" y="0"/>
+          <a:ext cx="0" cy="0"/>
+          <a:chOff x="0" y="0"/>
+          <a:chExt cx="0" cy="0"/>
+        </a:xfrm>
+      </p:grpSpPr>
+      <p:sp>
+        <p:nvSpPr>
+          <p:cNvPr id="2" name="Slide Image Placeholder 1"/>
+          <p:cNvSpPr>
+            <a:spLocks noGrp="1" noRot="1" noChangeAspect="1"/>
+          </p:cNvSpPr>
+          <p:nvPr>
+            <p:ph type="sldImg"/>
+          </p:nvPr>
+        </p:nvSpPr>
+        <p:spPr/>
+      </p:sp>
+      <p:sp>
+        <p:nvSpPr>
+          <p:cNvPr id="3" name="Notes Placeholder 2"/>
+          <p:cNvSpPr>
+            <a:spLocks noGrp="1"/>
+          </p:cNvSpPr>
+          <p:nvPr>
+            <p:ph type="body" idx="1"/>
+          </p:nvPr>
+        </p:nvSpPr>
+        <p:spPr/>
+        <p:txBody>
+          <a:bodyPr/>
+          <a:lstStyle/>
+          <a:p>
+            <a:pPr marL="0" marR="0" lvl="0" indent="0" algn="l" defTabSz="914400" rtl="0" eaLnBrk="1" fontAlgn="auto" latinLnBrk="0" hangingPunct="1">
+              <a:lnSpc>
+                <a:spcPct val="100000"/>
+              </a:lnSpc>
+              <a:spcBef>
+                <a:spcPts val="0"/>
+              </a:spcBef>
+              <a:spcAft>
+                <a:spcPts val="0"/>
+              </a:spcAft>
+              <a:buClrTx/>
+              <a:buSzTx/>
+              <a:buFontTx/>
+              <a:buNone/>
+              <a:tabLst/>
+              <a:defRPr/>
+            </a:pPr>
+            <a:r>
+              <a:rPr lang="en-AU" dirty="0"/>
+              <a:t>Teacher Notes:</a:t>
+            </a:r>
+          </a:p>
+          <a:p>
+            <a:pPr marL="0" marR="0" lvl="0" indent="0" algn="l" defTabSz="914400" rtl="0" eaLnBrk="1" fontAlgn="auto" latinLnBrk="0" hangingPunct="1">
+              <a:lnSpc>
+                <a:spcPct val="100000"/>
+              </a:lnSpc>
+              <a:spcBef>
+                <a:spcPts val="0"/>
+              </a:spcBef>
+              <a:spcAft>
+                <a:spcPts val="0"/>
+              </a:spcAft>
+              <a:buClrTx/>
+              <a:buSzTx/>
+              <a:buFontTx/>
+              <a:buNone/>
+              <a:tabLst/>
+              <a:defRPr/>
+            </a:pPr>
+            <a:r>
+              <a:rPr lang="en-AU" dirty="0"/>
+              <a:t>(index=* for demo only, use a specified index in production environment)</a:t>
+            </a:r>
+          </a:p>
+          <a:p>
+            <a:pPr marL="0" marR="0" lvl="0" indent="0" algn="l" defTabSz="914400" rtl="0" eaLnBrk="1" fontAlgn="auto" latinLnBrk="0" hangingPunct="1">
+              <a:lnSpc>
+                <a:spcPct val="100000"/>
+              </a:lnSpc>
+              <a:spcBef>
+                <a:spcPts val="0"/>
+              </a:spcBef>
+              <a:spcAft>
+                <a:spcPts val="0"/>
+              </a:spcAft>
+              <a:buClrTx/>
+              <a:buSzTx/>
+              <a:buFontTx/>
+              <a:buNone/>
+              <a:tabLst/>
+              <a:defRPr/>
+            </a:pPr>
+            <a:endParaRPr lang="en-AU" dirty="0"/>
+          </a:p>
+          <a:p>
+            <a:pPr marL="0" marR="0" lvl="0" indent="0" algn="l" defTabSz="914400" rtl="0" eaLnBrk="1" fontAlgn="auto" latinLnBrk="0" hangingPunct="1">
+              <a:lnSpc>
+                <a:spcPct val="100000"/>
+              </a:lnSpc>
+              <a:spcBef>
+                <a:spcPts val="0"/>
+              </a:spcBef>
+              <a:spcAft>
+                <a:spcPts val="0"/>
+              </a:spcAft>
+              <a:buClrTx/>
+              <a:buSzTx/>
+              <a:buFontTx/>
+              <a:buNone/>
+              <a:tabLst/>
+              <a:defRPr/>
+            </a:pPr>
+            <a:r>
+              <a:rPr lang="en-AU" dirty="0"/>
+              <a:t>The field for source </a:t>
+            </a:r>
+            <a:r>
+              <a:rPr lang="en-AU" dirty="0" err="1"/>
+              <a:t>ip</a:t>
+            </a:r>
+            <a:r>
+              <a:rPr lang="en-AU" dirty="0"/>
+              <a:t> may change based on the source the events are extracted from</a:t>
+            </a:r>
+          </a:p>
+          <a:p>
+            <a:endParaRPr lang="en-AU" dirty="0"/>
+          </a:p>
+        </p:txBody>
+      </p:sp>
+      <p:sp>
+        <p:nvSpPr>
+          <p:cNvPr id="4" name="Slide Number Placeholder 3"/>
+          <p:cNvSpPr>
+            <a:spLocks noGrp="1"/>
+          </p:cNvSpPr>
+          <p:nvPr>
+            <p:ph type="sldNum" sz="quarter" idx="5"/>
+          </p:nvPr>
+        </p:nvSpPr>
+        <p:spPr/>
+        <p:txBody>
+          <a:bodyPr/>
+          <a:lstStyle/>
+          <a:p>
+            <a:fld id="{62F461C2-7142-42A3-A2AC-57CDC5960F55}" type="slidenum">
+              <a:rPr lang="en-AU" smtClean="0"/>
+              <a:t>6</a:t>
+            </a:fld>
+            <a:endParaRPr lang="en-AU"/>
+          </a:p>
+        </p:txBody>
+      </p:sp>
+    </p:spTree>
+    <p:extLst>
+      <p:ext uri="{BB962C8B-B14F-4D97-AF65-F5344CB8AC3E}">
+        <p14:creationId xmlns:p14="http://schemas.microsoft.com/office/powerpoint/2010/main" val="1429403502"/>
+      </p:ext>
+    </p:extLst>
+  </p:cSld>
+  <p:clrMapOvr>
+    <a:masterClrMapping/>
+  </p:clrMapOvr>
+</p:notes>
+</file>
+
+<file path=ppt/notesSlides/notesSlide5.xml><?xml version="1.0" encoding="utf-8"?>
+<p:notes xmlns:a="http://schemas.openxmlformats.org/drawingml/2006/main" xmlns:r="http://schemas.openxmlformats.org/officeDocument/2006/relationships" xmlns:p="http://schemas.openxmlformats.org/presentationml/2006/main">
+  <p:cSld>
+    <p:spTree>
+      <p:nvGrpSpPr>
+        <p:cNvPr id="1" name=""/>
+        <p:cNvGrpSpPr/>
+        <p:nvPr/>
+      </p:nvGrpSpPr>
+      <p:grpSpPr>
+        <a:xfrm>
+          <a:off x="0" y="0"/>
+          <a:ext cx="0" cy="0"/>
+          <a:chOff x="0" y="0"/>
+          <a:chExt cx="0" cy="0"/>
+        </a:xfrm>
+      </p:grpSpPr>
+      <p:sp>
+        <p:nvSpPr>
+          <p:cNvPr id="2" name="Slide Image Placeholder 1"/>
+          <p:cNvSpPr>
+            <a:spLocks noGrp="1" noRot="1" noChangeAspect="1"/>
+          </p:cNvSpPr>
+          <p:nvPr>
+            <p:ph type="sldImg"/>
+          </p:nvPr>
+        </p:nvSpPr>
+        <p:spPr/>
+      </p:sp>
+      <p:sp>
+        <p:nvSpPr>
+          <p:cNvPr id="3" name="Notes Placeholder 2"/>
+          <p:cNvSpPr>
+            <a:spLocks noGrp="1"/>
+          </p:cNvSpPr>
+          <p:nvPr>
+            <p:ph type="body" idx="1"/>
+          </p:nvPr>
+        </p:nvSpPr>
+        <p:spPr/>
+        <p:txBody>
+          <a:bodyPr/>
+          <a:lstStyle/>
+          <a:p>
+            <a:r>
+              <a:rPr lang="en-US" dirty="0"/>
+              <a:t>Teacher Notes:</a:t>
+            </a:r>
+          </a:p>
+          <a:p>
+            <a:endParaRPr lang="en-US" dirty="0"/>
+          </a:p>
+          <a:p>
+            <a:r>
+              <a:rPr lang="en-US" dirty="0"/>
+              <a:t>A way of refining search results containing only the fields you apply</a:t>
+            </a:r>
+            <a:endParaRPr lang="en-AU" dirty="0"/>
+          </a:p>
+        </p:txBody>
+      </p:sp>
+      <p:sp>
+        <p:nvSpPr>
+          <p:cNvPr id="4" name="Slide Number Placeholder 3"/>
+          <p:cNvSpPr>
+            <a:spLocks noGrp="1"/>
+          </p:cNvSpPr>
+          <p:nvPr>
+            <p:ph type="sldNum" sz="quarter" idx="5"/>
+          </p:nvPr>
+        </p:nvSpPr>
+        <p:spPr/>
+        <p:txBody>
+          <a:bodyPr/>
+          <a:lstStyle/>
+          <a:p>
+            <a:fld id="{62F461C2-7142-42A3-A2AC-57CDC5960F55}" type="slidenum">
+              <a:rPr lang="en-AU" smtClean="0"/>
+              <a:t>7</a:t>
+            </a:fld>
+            <a:endParaRPr lang="en-AU"/>
+          </a:p>
+        </p:txBody>
+      </p:sp>
+    </p:spTree>
+    <p:extLst>
+      <p:ext uri="{BB962C8B-B14F-4D97-AF65-F5344CB8AC3E}">
+        <p14:creationId xmlns:p14="http://schemas.microsoft.com/office/powerpoint/2010/main" val="10295205"/>
+      </p:ext>
+    </p:extLst>
+  </p:cSld>
+  <p:clrMapOvr>
+    <a:masterClrMapping/>
+  </p:clrMapOvr>
+</p:notes>
+</file>
+
+<file path=ppt/notesSlides/notesSlide6.xml><?xml version="1.0" encoding="utf-8"?>
+<p:notes xmlns:a="http://schemas.openxmlformats.org/drawingml/2006/main" xmlns:r="http://schemas.openxmlformats.org/officeDocument/2006/relationships" xmlns:p="http://schemas.openxmlformats.org/presentationml/2006/main">
+  <p:cSld>
+    <p:spTree>
+      <p:nvGrpSpPr>
+        <p:cNvPr id="1" name=""/>
+        <p:cNvGrpSpPr/>
+        <p:nvPr/>
+      </p:nvGrpSpPr>
+      <p:grpSpPr>
+        <a:xfrm>
+          <a:off x="0" y="0"/>
+          <a:ext cx="0" cy="0"/>
+          <a:chOff x="0" y="0"/>
+          <a:chExt cx="0" cy="0"/>
+        </a:xfrm>
+      </p:grpSpPr>
+      <p:sp>
+        <p:nvSpPr>
+          <p:cNvPr id="2" name="Slide Image Placeholder 1"/>
+          <p:cNvSpPr>
+            <a:spLocks noGrp="1" noRot="1" noChangeAspect="1"/>
+          </p:cNvSpPr>
+          <p:nvPr>
+            <p:ph type="sldImg"/>
+          </p:nvPr>
+        </p:nvSpPr>
+        <p:spPr/>
+      </p:sp>
+      <p:sp>
+        <p:nvSpPr>
+          <p:cNvPr id="3" name="Notes Placeholder 2"/>
+          <p:cNvSpPr>
+            <a:spLocks noGrp="1"/>
+          </p:cNvSpPr>
+          <p:nvPr>
+            <p:ph type="body" idx="1"/>
+          </p:nvPr>
+        </p:nvSpPr>
+        <p:spPr/>
+        <p:txBody>
+          <a:bodyPr/>
+          <a:lstStyle/>
+          <a:p>
+            <a:r>
+              <a:rPr lang="en-US" dirty="0"/>
+              <a:t>Teacher Note:</a:t>
+            </a:r>
+          </a:p>
+          <a:p>
+            <a:endParaRPr lang="en-US" dirty="0"/>
+          </a:p>
+          <a:p>
+            <a:r>
+              <a:rPr lang="en-US" dirty="0"/>
+              <a:t>!= is the same as DOES NOT EQUAL</a:t>
+            </a:r>
+            <a:endParaRPr lang="en-AU" dirty="0"/>
+          </a:p>
+        </p:txBody>
+      </p:sp>
+      <p:sp>
+        <p:nvSpPr>
+          <p:cNvPr id="4" name="Slide Number Placeholder 3"/>
+          <p:cNvSpPr>
+            <a:spLocks noGrp="1"/>
+          </p:cNvSpPr>
+          <p:nvPr>
+            <p:ph type="sldNum" sz="quarter" idx="5"/>
+          </p:nvPr>
+        </p:nvSpPr>
+        <p:spPr/>
+        <p:txBody>
+          <a:bodyPr/>
+          <a:lstStyle/>
+          <a:p>
+            <a:fld id="{62F461C2-7142-42A3-A2AC-57CDC5960F55}" type="slidenum">
+              <a:rPr lang="en-AU" smtClean="0"/>
+              <a:t>9</a:t>
+            </a:fld>
+            <a:endParaRPr lang="en-AU"/>
+          </a:p>
+        </p:txBody>
+      </p:sp>
+    </p:spTree>
+    <p:extLst>
+      <p:ext uri="{BB962C8B-B14F-4D97-AF65-F5344CB8AC3E}">
+        <p14:creationId xmlns:p14="http://schemas.microsoft.com/office/powerpoint/2010/main" val="4032206237"/>
+      </p:ext>
+    </p:extLst>
+  </p:cSld>
+  <p:clrMapOvr>
+    <a:masterClrMapping/>
+  </p:clrMapOvr>
+</p:notes>
+</file>
+
+<file path=ppt/notesSlides/notesSlide7.xml><?xml version="1.0" encoding="utf-8"?>
+<p:notes xmlns:a="http://schemas.openxmlformats.org/drawingml/2006/main" xmlns:r="http://schemas.openxmlformats.org/officeDocument/2006/relationships" xmlns:p="http://schemas.openxmlformats.org/presentationml/2006/main">
+  <p:cSld>
+    <p:spTree>
+      <p:nvGrpSpPr>
+        <p:cNvPr id="1" name=""/>
+        <p:cNvGrpSpPr/>
+        <p:nvPr/>
+      </p:nvGrpSpPr>
+      <p:grpSpPr>
+        <a:xfrm>
+          <a:off x="0" y="0"/>
+          <a:ext cx="0" cy="0"/>
+          <a:chOff x="0" y="0"/>
+          <a:chExt cx="0" cy="0"/>
+        </a:xfrm>
+      </p:grpSpPr>
+      <p:sp>
+        <p:nvSpPr>
+          <p:cNvPr id="2" name="Slide Image Placeholder 1"/>
+          <p:cNvSpPr>
+            <a:spLocks noGrp="1" noRot="1" noChangeAspect="1"/>
+          </p:cNvSpPr>
+          <p:nvPr>
+            <p:ph type="sldImg"/>
+          </p:nvPr>
+        </p:nvSpPr>
+        <p:spPr/>
+      </p:sp>
+      <p:sp>
+        <p:nvSpPr>
+          <p:cNvPr id="3" name="Notes Placeholder 2"/>
+          <p:cNvSpPr>
+            <a:spLocks noGrp="1"/>
+          </p:cNvSpPr>
+          <p:nvPr>
+            <p:ph type="body" idx="1"/>
+          </p:nvPr>
+        </p:nvSpPr>
+        <p:spPr/>
+        <p:txBody>
+          <a:bodyPr/>
+          <a:lstStyle/>
+          <a:p>
+            <a:r>
+              <a:rPr lang="en-US" dirty="0"/>
+              <a:t>Teacher Notes:</a:t>
+            </a:r>
+          </a:p>
+          <a:p>
+            <a:endParaRPr lang="en-US" dirty="0"/>
+          </a:p>
+          <a:p>
+            <a:r>
+              <a:rPr lang="en-US" dirty="0"/>
+              <a:t>Regex is very useful especially to apply fine filtering or refine searches.</a:t>
+            </a:r>
+          </a:p>
+          <a:p>
+            <a:endParaRPr lang="en-US" dirty="0"/>
+          </a:p>
+          <a:p>
+            <a:pPr marL="0" marR="0" lvl="0" indent="0" algn="l" defTabSz="914400" rtl="0" eaLnBrk="1" fontAlgn="auto" latinLnBrk="0" hangingPunct="1">
+              <a:lnSpc>
+                <a:spcPct val="100000"/>
+              </a:lnSpc>
+              <a:spcBef>
+                <a:spcPts val="0"/>
+              </a:spcBef>
+              <a:spcAft>
+                <a:spcPts val="0"/>
+              </a:spcAft>
+              <a:buClrTx/>
+              <a:buSzTx/>
+              <a:buFontTx/>
+              <a:buNone/>
+              <a:tabLst/>
+              <a:defRPr/>
+            </a:pPr>
+            <a:r>
+              <a:rPr lang="en-AU" dirty="0"/>
+              <a:t>If your not strong with regex its okay AI is your best friend.</a:t>
+            </a:r>
+          </a:p>
+          <a:p>
+            <a:endParaRPr lang="en-US" dirty="0"/>
+          </a:p>
+          <a:p>
+            <a:endParaRPr lang="en-AU" dirty="0"/>
+          </a:p>
+        </p:txBody>
+      </p:sp>
+      <p:sp>
+        <p:nvSpPr>
+          <p:cNvPr id="4" name="Slide Number Placeholder 3"/>
+          <p:cNvSpPr>
+            <a:spLocks noGrp="1"/>
+          </p:cNvSpPr>
+          <p:nvPr>
+            <p:ph type="sldNum" sz="quarter" idx="5"/>
+          </p:nvPr>
+        </p:nvSpPr>
+        <p:spPr/>
+        <p:txBody>
+          <a:bodyPr/>
+          <a:lstStyle/>
+          <a:p>
+            <a:fld id="{62F461C2-7142-42A3-A2AC-57CDC5960F55}" type="slidenum">
+              <a:rPr lang="en-AU" smtClean="0"/>
+              <a:t>10</a:t>
+            </a:fld>
+            <a:endParaRPr lang="en-AU"/>
+          </a:p>
+        </p:txBody>
+      </p:sp>
+    </p:spTree>
+    <p:extLst>
+      <p:ext uri="{BB962C8B-B14F-4D97-AF65-F5344CB8AC3E}">
+        <p14:creationId xmlns:p14="http://schemas.microsoft.com/office/powerpoint/2010/main" val="735261890"/>
+      </p:ext>
+    </p:extLst>
+  </p:cSld>
+  <p:clrMapOvr>
+    <a:masterClrMapping/>
+  </p:clrMapOvr>
+</p:notes>
+</file>
+
+<file path=ppt/notesSlides/notesSlide8.xml><?xml version="1.0" encoding="utf-8"?>
+<p:notes xmlns:a="http://schemas.openxmlformats.org/drawingml/2006/main" xmlns:r="http://schemas.openxmlformats.org/officeDocument/2006/relationships" xmlns:p="http://schemas.openxmlformats.org/presentationml/2006/main">
+  <p:cSld>
+    <p:spTree>
+      <p:nvGrpSpPr>
+        <p:cNvPr id="1" name=""/>
+        <p:cNvGrpSpPr/>
+        <p:nvPr/>
+      </p:nvGrpSpPr>
+      <p:grpSpPr>
+        <a:xfrm>
+          <a:off x="0" y="0"/>
+          <a:ext cx="0" cy="0"/>
+          <a:chOff x="0" y="0"/>
+          <a:chExt cx="0" cy="0"/>
+        </a:xfrm>
+      </p:grpSpPr>
+      <p:sp>
+        <p:nvSpPr>
+          <p:cNvPr id="2" name="Slide Image Placeholder 1"/>
+          <p:cNvSpPr>
+            <a:spLocks noGrp="1" noRot="1" noChangeAspect="1"/>
+          </p:cNvSpPr>
+          <p:nvPr>
+            <p:ph type="sldImg"/>
+          </p:nvPr>
+        </p:nvSpPr>
+        <p:spPr/>
+      </p:sp>
+      <p:sp>
+        <p:nvSpPr>
+          <p:cNvPr id="3" name="Notes Placeholder 2"/>
+          <p:cNvSpPr>
+            <a:spLocks noGrp="1"/>
+          </p:cNvSpPr>
+          <p:nvPr>
+            <p:ph type="body" idx="1"/>
+          </p:nvPr>
+        </p:nvSpPr>
+        <p:spPr/>
+        <p:txBody>
+          <a:bodyPr/>
+          <a:lstStyle/>
+          <a:p>
+            <a:r>
+              <a:rPr lang="en-US" dirty="0"/>
+              <a:t>Teacher Notes:</a:t>
+            </a:r>
+          </a:p>
+          <a:p>
+            <a:endParaRPr lang="en-US" dirty="0"/>
+          </a:p>
+          <a:p>
+            <a:r>
+              <a:rPr lang="en-US" dirty="0"/>
+              <a:t>A comparison baseline is commonly used as it displays and easily flags anomalies.</a:t>
+            </a:r>
+            <a:endParaRPr lang="en-AU" dirty="0"/>
+          </a:p>
+        </p:txBody>
+      </p:sp>
+      <p:sp>
+        <p:nvSpPr>
+          <p:cNvPr id="4" name="Slide Number Placeholder 3"/>
+          <p:cNvSpPr>
+            <a:spLocks noGrp="1"/>
+          </p:cNvSpPr>
+          <p:nvPr>
+            <p:ph type="sldNum" sz="quarter" idx="5"/>
+          </p:nvPr>
+        </p:nvSpPr>
+        <p:spPr/>
+        <p:txBody>
+          <a:bodyPr/>
+          <a:lstStyle/>
+          <a:p>
+            <a:fld id="{62F461C2-7142-42A3-A2AC-57CDC5960F55}" type="slidenum">
+              <a:rPr lang="en-AU" smtClean="0"/>
+              <a:t>11</a:t>
+            </a:fld>
+            <a:endParaRPr lang="en-AU"/>
+          </a:p>
+        </p:txBody>
+      </p:sp>
+    </p:spTree>
+    <p:extLst>
+      <p:ext uri="{BB962C8B-B14F-4D97-AF65-F5344CB8AC3E}">
+        <p14:creationId xmlns:p14="http://schemas.microsoft.com/office/powerpoint/2010/main" val="1891774433"/>
+      </p:ext>
+    </p:extLst>
+  </p:cSld>
+  <p:clrMapOvr>
+    <a:masterClrMapping/>
+  </p:clrMapOvr>
+</p:notes>
+</file>
+
 <file path=ppt/slideLayouts/slideLayout1.xml><?xml version="1.0" encoding="utf-8"?>
 <p:sldLayout xmlns:a="http://schemas.openxmlformats.org/drawingml/2006/main" xmlns:r="http://schemas.openxmlformats.org/officeDocument/2006/relationships" xmlns:p="http://schemas.openxmlformats.org/presentationml/2006/main" type="title" preserve="1">
   <p:cSld name="Title Slide">
@@ -281,7 +1585,7 @@
           <a:p>
             <a:fld id="{266447FA-567A-498F-ABE1-423C63A16A7D}" type="datetimeFigureOut">
               <a:rPr lang="en-AU" smtClean="0"/>
-              <a:t>22/01/2026</a:t>
+              <a:t>13/04/2026</a:t>
             </a:fld>
             <a:endParaRPr lang="en-AU"/>
           </a:p>
@@ -481,7 +1785,7 @@
           <a:p>
             <a:fld id="{266447FA-567A-498F-ABE1-423C63A16A7D}" type="datetimeFigureOut">
               <a:rPr lang="en-AU" smtClean="0"/>
-              <a:t>22/01/2026</a:t>
+              <a:t>13/04/2026</a:t>
             </a:fld>
             <a:endParaRPr lang="en-AU"/>
           </a:p>
@@ -691,7 +1995,7 @@
           <a:p>
             <a:fld id="{266447FA-567A-498F-ABE1-423C63A16A7D}" type="datetimeFigureOut">
               <a:rPr lang="en-AU" smtClean="0"/>
-              <a:t>22/01/2026</a:t>
+              <a:t>13/04/2026</a:t>
             </a:fld>
             <a:endParaRPr lang="en-AU"/>
           </a:p>
@@ -891,7 +2195,7 @@
           <a:p>
             <a:fld id="{266447FA-567A-498F-ABE1-423C63A16A7D}" type="datetimeFigureOut">
               <a:rPr lang="en-AU" smtClean="0"/>
-              <a:t>22/01/2026</a:t>
+              <a:t>13/04/2026</a:t>
             </a:fld>
             <a:endParaRPr lang="en-AU"/>
           </a:p>
@@ -1167,7 +2471,7 @@
           <a:p>
             <a:fld id="{266447FA-567A-498F-ABE1-423C63A16A7D}" type="datetimeFigureOut">
               <a:rPr lang="en-AU" smtClean="0"/>
-              <a:t>22/01/2026</a:t>
+              <a:t>13/04/2026</a:t>
             </a:fld>
             <a:endParaRPr lang="en-AU"/>
           </a:p>
@@ -1435,7 +2739,7 @@
           <a:p>
             <a:fld id="{266447FA-567A-498F-ABE1-423C63A16A7D}" type="datetimeFigureOut">
               <a:rPr lang="en-AU" smtClean="0"/>
-              <a:t>22/01/2026</a:t>
+              <a:t>13/04/2026</a:t>
             </a:fld>
             <a:endParaRPr lang="en-AU"/>
           </a:p>
@@ -1850,7 +3154,7 @@
           <a:p>
             <a:fld id="{266447FA-567A-498F-ABE1-423C63A16A7D}" type="datetimeFigureOut">
               <a:rPr lang="en-AU" smtClean="0"/>
-              <a:t>22/01/2026</a:t>
+              <a:t>13/04/2026</a:t>
             </a:fld>
             <a:endParaRPr lang="en-AU"/>
           </a:p>
@@ -1992,7 +3296,7 @@
           <a:p>
             <a:fld id="{266447FA-567A-498F-ABE1-423C63A16A7D}" type="datetimeFigureOut">
               <a:rPr lang="en-AU" smtClean="0"/>
-              <a:t>22/01/2026</a:t>
+              <a:t>13/04/2026</a:t>
             </a:fld>
             <a:endParaRPr lang="en-AU"/>
           </a:p>
@@ -2105,7 +3409,7 @@
           <a:p>
             <a:fld id="{266447FA-567A-498F-ABE1-423C63A16A7D}" type="datetimeFigureOut">
               <a:rPr lang="en-AU" smtClean="0"/>
-              <a:t>22/01/2026</a:t>
+              <a:t>13/04/2026</a:t>
             </a:fld>
             <a:endParaRPr lang="en-AU"/>
           </a:p>
@@ -2418,7 +3722,7 @@
           <a:p>
             <a:fld id="{266447FA-567A-498F-ABE1-423C63A16A7D}" type="datetimeFigureOut">
               <a:rPr lang="en-AU" smtClean="0"/>
-              <a:t>22/01/2026</a:t>
+              <a:t>13/04/2026</a:t>
             </a:fld>
             <a:endParaRPr lang="en-AU"/>
           </a:p>
@@ -2707,7 +4011,7 @@
           <a:p>
             <a:fld id="{266447FA-567A-498F-ABE1-423C63A16A7D}" type="datetimeFigureOut">
               <a:rPr lang="en-AU" smtClean="0"/>
-              <a:t>22/01/2026</a:t>
+              <a:t>13/04/2026</a:t>
             </a:fld>
             <a:endParaRPr lang="en-AU"/>
           </a:p>
@@ -2950,7 +4254,7 @@
           <a:p>
             <a:fld id="{266447FA-567A-498F-ABE1-423C63A16A7D}" type="datetimeFigureOut">
               <a:rPr lang="en-AU" smtClean="0"/>
-              <a:t>22/01/2026</a:t>
+              <a:t>13/04/2026</a:t>
             </a:fld>
             <a:endParaRPr lang="en-AU"/>
           </a:p>
@@ -3456,7 +4760,7 @@
           <p:cNvPr id="2" name="Title 1">
             <a:extLst>
               <a:ext uri="{FF2B5EF4-FFF2-40B4-BE49-F238E27FC236}">
-                <a16:creationId xmlns:a16="http://schemas.microsoft.com/office/drawing/2014/main" id="{CC5BE3DB-F5AD-4DBF-13D3-44CAA9F95C09}"/>
+                <a16:creationId xmlns:a16="http://schemas.microsoft.com/office/drawing/2014/main" id="{311C424B-4F60-03EA-57A9-C4318A90D1A8}"/>
               </a:ext>
             </a:extLst>
           </p:cNvPr>
@@ -3474,8 +4778,13 @@
           <a:p>
             <a:r>
               <a:rPr lang="en-AU" dirty="0"/>
-              <a:t>Lab Tables</a:t>
-            </a:r>
+              <a:t>Regex in </a:t>
+            </a:r>
+            <a:r>
+              <a:rPr lang="en-AU" dirty="0" err="1"/>
+              <a:t>splunk</a:t>
+            </a:r>
+            <a:endParaRPr lang="en-AU" dirty="0"/>
           </a:p>
         </p:txBody>
       </p:sp>
@@ -3484,7 +4793,7 @@
           <p:cNvPr id="3" name="Content Placeholder 2">
             <a:extLst>
               <a:ext uri="{FF2B5EF4-FFF2-40B4-BE49-F238E27FC236}">
-                <a16:creationId xmlns:a16="http://schemas.microsoft.com/office/drawing/2014/main" id="{D7C1AAB1-386C-2B85-D0E7-5C033C9E869C}"/>
+                <a16:creationId xmlns:a16="http://schemas.microsoft.com/office/drawing/2014/main" id="{0BE113D1-625D-E148-8A2F-8E8922728008}"/>
               </a:ext>
             </a:extLst>
           </p:cNvPr>
@@ -3502,77 +4811,30 @@
           <a:p>
             <a:r>
               <a:rPr lang="en-AU" dirty="0"/>
-              <a:t>In the con.log source type can you output the </a:t>
-            </a:r>
-            <a:r>
-              <a:rPr lang="en-AU" dirty="0" err="1"/>
-              <a:t>src</a:t>
-            </a:r>
-            <a:r>
-              <a:rPr lang="en-AU" dirty="0"/>
-              <a:t> IP, </a:t>
-            </a:r>
-            <a:r>
-              <a:rPr lang="en-AU" dirty="0" err="1"/>
-              <a:t>Dst</a:t>
-            </a:r>
-            <a:r>
-              <a:rPr lang="en-AU" dirty="0"/>
-              <a:t> IP, </a:t>
-            </a:r>
-            <a:r>
-              <a:rPr lang="en-AU" dirty="0" err="1"/>
-              <a:t>Src</a:t>
-            </a:r>
-            <a:r>
-              <a:rPr lang="en-AU" dirty="0"/>
-              <a:t> port, </a:t>
-            </a:r>
-            <a:r>
-              <a:rPr lang="en-AU" dirty="0" err="1"/>
-              <a:t>Dst</a:t>
-            </a:r>
-            <a:r>
-              <a:rPr lang="en-AU" dirty="0"/>
-              <a:t> port. </a:t>
-            </a:r>
-          </a:p>
-          <a:p>
-            <a:r>
-              <a:rPr lang="en-AU" dirty="0"/>
-              <a:t>Afterwards can you </a:t>
-            </a:r>
-            <a:r>
-              <a:rPr lang="en-AU" dirty="0" err="1"/>
-              <a:t>dedup</a:t>
-            </a:r>
-            <a:r>
-              <a:rPr lang="en-AU" dirty="0"/>
-              <a:t> the </a:t>
-            </a:r>
-            <a:r>
-              <a:rPr lang="en-AU" dirty="0" err="1"/>
-              <a:t>Src</a:t>
-            </a:r>
-            <a:r>
-              <a:rPr lang="en-AU" dirty="0"/>
-              <a:t> port and </a:t>
-            </a:r>
-            <a:r>
-              <a:rPr lang="en-AU" dirty="0" err="1"/>
-              <a:t>Dst</a:t>
-            </a:r>
-            <a:r>
-              <a:rPr lang="en-AU" dirty="0"/>
-              <a:t> port</a:t>
-            </a:r>
+              <a:t>If your events has too many strings where it is not able to properly extract values, you can regex events to get better filters. </a:t>
+            </a:r>
+          </a:p>
+          <a:p>
+            <a:pPr marL="0" indent="0">
+              <a:buNone/>
+            </a:pPr>
+            <a:endParaRPr lang="en-AU" dirty="0"/>
+          </a:p>
+          <a:p>
+            <a:endParaRPr lang="en-AU" dirty="0"/>
+          </a:p>
+          <a:p>
+            <a:pPr marL="0" indent="0">
+              <a:buNone/>
+            </a:pPr>
+            <a:endParaRPr lang="en-AU" dirty="0"/>
           </a:p>
         </p:txBody>
       </p:sp>
     </p:spTree>
     <p:extLst>
       <p:ext uri="{BB962C8B-B14F-4D97-AF65-F5344CB8AC3E}">
-        <p14:creationId xmlns:p14="http://schemas.microsoft.com/office/powerpoint/2010/main" val="3415588222"/>
+        <p14:creationId xmlns:p14="http://schemas.microsoft.com/office/powerpoint/2010/main" val="2712621605"/>
       </p:ext>
     </p:extLst>
   </p:cSld>
@@ -3604,7 +4866,7 @@
           <p:cNvPr id="2" name="Title 1">
             <a:extLst>
               <a:ext uri="{FF2B5EF4-FFF2-40B4-BE49-F238E27FC236}">
-                <a16:creationId xmlns:a16="http://schemas.microsoft.com/office/drawing/2014/main" id="{157AE698-46F7-3E5F-F52A-65B076596BD7}"/>
+                <a16:creationId xmlns:a16="http://schemas.microsoft.com/office/drawing/2014/main" id="{B881D264-8733-0EF3-C8CC-B7A375921B77}"/>
               </a:ext>
             </a:extLst>
           </p:cNvPr>
@@ -3621,75 +4883,48 @@
           <a:lstStyle/>
           <a:p>
             <a:r>
-              <a:rPr lang="en-US" dirty="0"/>
-              <a:t>Logic Operators in Splunk </a:t>
-            </a:r>
+              <a:rPr lang="en-AU" dirty="0"/>
+              <a:t>Baselining</a:t>
+            </a:r>
+          </a:p>
+        </p:txBody>
+      </p:sp>
+      <p:sp>
+        <p:nvSpPr>
+          <p:cNvPr id="3" name="Content Placeholder 2">
+            <a:extLst>
+              <a:ext uri="{FF2B5EF4-FFF2-40B4-BE49-F238E27FC236}">
+                <a16:creationId xmlns:a16="http://schemas.microsoft.com/office/drawing/2014/main" id="{B92AC551-11EA-69E8-93ED-42FC9CDCC07B}"/>
+              </a:ext>
+            </a:extLst>
+          </p:cNvPr>
+          <p:cNvSpPr>
+            <a:spLocks noGrp="1"/>
+          </p:cNvSpPr>
+          <p:nvPr>
+            <p:ph idx="1"/>
+          </p:nvPr>
+        </p:nvSpPr>
+        <p:spPr/>
+        <p:txBody>
+          <a:bodyPr/>
+          <a:lstStyle/>
+          <a:p>
+            <a:r>
+              <a:rPr lang="en-AU" dirty="0"/>
+              <a:t>When you setup in a network the first step you conduct is usually a baseline. </a:t>
+            </a:r>
+          </a:p>
+          <a:p>
+            <a:pPr marL="0" indent="0">
+              <a:buNone/>
+            </a:pPr>
             <a:endParaRPr lang="en-AU" dirty="0"/>
           </a:p>
-        </p:txBody>
-      </p:sp>
-      <p:sp>
-        <p:nvSpPr>
-          <p:cNvPr id="3" name="Content Placeholder 2">
-            <a:extLst>
-              <a:ext uri="{FF2B5EF4-FFF2-40B4-BE49-F238E27FC236}">
-                <a16:creationId xmlns:a16="http://schemas.microsoft.com/office/drawing/2014/main" id="{37FA90E8-A62A-85F1-C850-33791870187D}"/>
-              </a:ext>
-            </a:extLst>
-          </p:cNvPr>
-          <p:cNvSpPr>
-            <a:spLocks noGrp="1"/>
-          </p:cNvSpPr>
-          <p:nvPr>
-            <p:ph idx="1"/>
-          </p:nvPr>
-        </p:nvSpPr>
-        <p:spPr/>
-        <p:txBody>
-          <a:bodyPr>
-            <a:normAutofit/>
-          </a:bodyPr>
-          <a:lstStyle/>
-          <a:p>
-            <a:r>
-              <a:rPr lang="en-US" dirty="0"/>
-              <a:t>Logical operators are used in Splunk searches to combine or refine conditions. They make searches more precise and enable more advanced filtering logic.</a:t>
-            </a:r>
-          </a:p>
-          <a:p>
-            <a:r>
-              <a:rPr lang="en-US" dirty="0"/>
-              <a:t>Common logical operators include AND, OR, and NOT.</a:t>
-            </a:r>
-          </a:p>
-          <a:p>
-            <a:r>
-              <a:rPr lang="en-US" b="1" dirty="0"/>
-              <a:t>AND</a:t>
-            </a:r>
-            <a:r>
-              <a:rPr lang="en-US" dirty="0"/>
-              <a:t> requires all conditions to be true (e.g., status=200 AND method=POST)</a:t>
-            </a:r>
-          </a:p>
-          <a:p>
-            <a:r>
-              <a:rPr lang="en-US" b="1" dirty="0"/>
-              <a:t>OR</a:t>
-            </a:r>
-            <a:r>
-              <a:rPr lang="en-US" dirty="0"/>
-              <a:t> allows any one of multiple conditions to be true (e.g., status=200 OR status=404)</a:t>
-            </a:r>
-          </a:p>
-          <a:p>
-            <a:r>
-              <a:rPr lang="en-US" b="1" dirty="0"/>
-              <a:t>NOT</a:t>
-            </a:r>
-            <a:r>
-              <a:rPr lang="en-US" dirty="0"/>
-              <a:t> excludes certain events from results (e.g., NOT status=200).</a:t>
+          <a:p>
+            <a:r>
+              <a:rPr lang="en-AU" dirty="0"/>
+              <a:t>You can do this by making CSV and for future searches you compare the output to the CSV any new unique events will flag it. </a:t>
             </a:r>
           </a:p>
         </p:txBody>
@@ -3697,7 +4932,7 @@
     </p:spTree>
     <p:extLst>
       <p:ext uri="{BB962C8B-B14F-4D97-AF65-F5344CB8AC3E}">
-        <p14:creationId xmlns:p14="http://schemas.microsoft.com/office/powerpoint/2010/main" val="1396224906"/>
+        <p14:creationId xmlns:p14="http://schemas.microsoft.com/office/powerpoint/2010/main" val="1719264778"/>
       </p:ext>
     </p:extLst>
   </p:cSld>
@@ -3729,886 +4964,6 @@
           <p:cNvPr id="2" name="Title 1">
             <a:extLst>
               <a:ext uri="{FF2B5EF4-FFF2-40B4-BE49-F238E27FC236}">
-                <a16:creationId xmlns:a16="http://schemas.microsoft.com/office/drawing/2014/main" id="{CA480424-4DA8-E140-05EC-2213F3957420}"/>
-              </a:ext>
-            </a:extLst>
-          </p:cNvPr>
-          <p:cNvSpPr>
-            <a:spLocks noGrp="1"/>
-          </p:cNvSpPr>
-          <p:nvPr>
-            <p:ph type="title"/>
-          </p:nvPr>
-        </p:nvSpPr>
-        <p:spPr/>
-        <p:txBody>
-          <a:bodyPr/>
-          <a:lstStyle/>
-          <a:p>
-            <a:r>
-              <a:rPr lang="en-AU" dirty="0"/>
-              <a:t>Demo Logical Operators</a:t>
-            </a:r>
-          </a:p>
-        </p:txBody>
-      </p:sp>
-      <p:sp>
-        <p:nvSpPr>
-          <p:cNvPr id="3" name="Content Placeholder 2">
-            <a:extLst>
-              <a:ext uri="{FF2B5EF4-FFF2-40B4-BE49-F238E27FC236}">
-                <a16:creationId xmlns:a16="http://schemas.microsoft.com/office/drawing/2014/main" id="{E3568E8A-F5B9-ADC2-56F8-9163DEF50641}"/>
-              </a:ext>
-            </a:extLst>
-          </p:cNvPr>
-          <p:cNvSpPr>
-            <a:spLocks noGrp="1"/>
-          </p:cNvSpPr>
-          <p:nvPr>
-            <p:ph idx="1"/>
-          </p:nvPr>
-        </p:nvSpPr>
-        <p:spPr/>
-        <p:txBody>
-          <a:bodyPr/>
-          <a:lstStyle/>
-          <a:p>
-            <a:r>
-              <a:rPr lang="en-AU" dirty="0"/>
-              <a:t>Show any prefetch file which starts WU but not the string WUACLT.EXE… </a:t>
-            </a:r>
-          </a:p>
-          <a:p>
-            <a:endParaRPr lang="en-AU" dirty="0"/>
-          </a:p>
-          <a:p>
-            <a:endParaRPr lang="en-AU" dirty="0"/>
-          </a:p>
-        </p:txBody>
-      </p:sp>
-      <p:pic>
-        <p:nvPicPr>
-          <p:cNvPr id="4" name="Picture 3">
-            <a:extLst>
-              <a:ext uri="{FF2B5EF4-FFF2-40B4-BE49-F238E27FC236}">
-                <a16:creationId xmlns:a16="http://schemas.microsoft.com/office/drawing/2014/main" id="{E7216382-AEA9-CD6A-F502-CA06A160BB06}"/>
-              </a:ext>
-            </a:extLst>
-          </p:cNvPr>
-          <p:cNvPicPr>
-            <a:picLocks noChangeAspect="1"/>
-          </p:cNvPicPr>
-          <p:nvPr/>
-        </p:nvPicPr>
-        <p:blipFill>
-          <a:blip r:embed="rId2"/>
-          <a:stretch>
-            <a:fillRect/>
-          </a:stretch>
-        </p:blipFill>
-        <p:spPr>
-          <a:xfrm>
-            <a:off x="2130562" y="3493634"/>
-            <a:ext cx="7930876" cy="865490"/>
-          </a:xfrm>
-          <a:prstGeom prst="rect">
-            <a:avLst/>
-          </a:prstGeom>
-          <a:ln w="25400">
-            <a:solidFill>
-              <a:schemeClr val="tx1"/>
-            </a:solidFill>
-          </a:ln>
-        </p:spPr>
-      </p:pic>
-    </p:spTree>
-    <p:extLst>
-      <p:ext uri="{BB962C8B-B14F-4D97-AF65-F5344CB8AC3E}">
-        <p14:creationId xmlns:p14="http://schemas.microsoft.com/office/powerpoint/2010/main" val="3272005510"/>
-      </p:ext>
-    </p:extLst>
-  </p:cSld>
-  <p:clrMapOvr>
-    <a:masterClrMapping/>
-  </p:clrMapOvr>
-</p:sld>
-</file>
-
-<file path=ppt/slides/slide13.xml><?xml version="1.0" encoding="utf-8"?>
-<p:sld xmlns:a="http://schemas.openxmlformats.org/drawingml/2006/main" xmlns:r="http://schemas.openxmlformats.org/officeDocument/2006/relationships" xmlns:p="http://schemas.openxmlformats.org/presentationml/2006/main">
-  <p:cSld>
-    <p:spTree>
-      <p:nvGrpSpPr>
-        <p:cNvPr id="1" name=""/>
-        <p:cNvGrpSpPr/>
-        <p:nvPr/>
-      </p:nvGrpSpPr>
-      <p:grpSpPr>
-        <a:xfrm>
-          <a:off x="0" y="0"/>
-          <a:ext cx="0" cy="0"/>
-          <a:chOff x="0" y="0"/>
-          <a:chExt cx="0" cy="0"/>
-        </a:xfrm>
-      </p:grpSpPr>
-      <p:sp>
-        <p:nvSpPr>
-          <p:cNvPr id="2" name="Title 1">
-            <a:extLst>
-              <a:ext uri="{FF2B5EF4-FFF2-40B4-BE49-F238E27FC236}">
-                <a16:creationId xmlns:a16="http://schemas.microsoft.com/office/drawing/2014/main" id="{3277F18B-D20D-3CF4-4536-CB6C1E9817DE}"/>
-              </a:ext>
-            </a:extLst>
-          </p:cNvPr>
-          <p:cNvSpPr>
-            <a:spLocks noGrp="1"/>
-          </p:cNvSpPr>
-          <p:nvPr>
-            <p:ph type="title"/>
-          </p:nvPr>
-        </p:nvSpPr>
-        <p:spPr/>
-        <p:txBody>
-          <a:bodyPr/>
-          <a:lstStyle/>
-          <a:p>
-            <a:r>
-              <a:rPr lang="en-AU" dirty="0"/>
-              <a:t>Lab Logical Operators</a:t>
-            </a:r>
-          </a:p>
-        </p:txBody>
-      </p:sp>
-      <p:sp>
-        <p:nvSpPr>
-          <p:cNvPr id="3" name="Content Placeholder 2">
-            <a:extLst>
-              <a:ext uri="{FF2B5EF4-FFF2-40B4-BE49-F238E27FC236}">
-                <a16:creationId xmlns:a16="http://schemas.microsoft.com/office/drawing/2014/main" id="{4B620310-7183-0779-DFC8-6378F4D70816}"/>
-              </a:ext>
-            </a:extLst>
-          </p:cNvPr>
-          <p:cNvSpPr>
-            <a:spLocks noGrp="1"/>
-          </p:cNvSpPr>
-          <p:nvPr>
-            <p:ph idx="1"/>
-          </p:nvPr>
-        </p:nvSpPr>
-        <p:spPr/>
-        <p:txBody>
-          <a:bodyPr/>
-          <a:lstStyle/>
-          <a:p>
-            <a:r>
-              <a:rPr lang="en-AU" dirty="0"/>
-              <a:t>Using the </a:t>
-            </a:r>
-            <a:r>
-              <a:rPr lang="en-AU" dirty="0" err="1"/>
-              <a:t>sourcetype</a:t>
-            </a:r>
-            <a:r>
-              <a:rPr lang="en-AU" dirty="0"/>
-              <a:t> </a:t>
-            </a:r>
-            <a:r>
-              <a:rPr lang="en-AU" dirty="0" err="1"/>
-              <a:t>pslist.json</a:t>
-            </a:r>
-            <a:r>
-              <a:rPr lang="en-AU" dirty="0"/>
-              <a:t> how many events contain  chrome.exe and backdoor.exe in the Exe field</a:t>
-            </a:r>
-          </a:p>
-        </p:txBody>
-      </p:sp>
-    </p:spTree>
-    <p:extLst>
-      <p:ext uri="{BB962C8B-B14F-4D97-AF65-F5344CB8AC3E}">
-        <p14:creationId xmlns:p14="http://schemas.microsoft.com/office/powerpoint/2010/main" val="1888692794"/>
-      </p:ext>
-    </p:extLst>
-  </p:cSld>
-  <p:clrMapOvr>
-    <a:masterClrMapping/>
-  </p:clrMapOvr>
-</p:sld>
-</file>
-
-<file path=ppt/slides/slide14.xml><?xml version="1.0" encoding="utf-8"?>
-<p:sld xmlns:a="http://schemas.openxmlformats.org/drawingml/2006/main" xmlns:r="http://schemas.openxmlformats.org/officeDocument/2006/relationships" xmlns:p="http://schemas.openxmlformats.org/presentationml/2006/main">
-  <p:cSld>
-    <p:spTree>
-      <p:nvGrpSpPr>
-        <p:cNvPr id="1" name=""/>
-        <p:cNvGrpSpPr/>
-        <p:nvPr/>
-      </p:nvGrpSpPr>
-      <p:grpSpPr>
-        <a:xfrm>
-          <a:off x="0" y="0"/>
-          <a:ext cx="0" cy="0"/>
-          <a:chOff x="0" y="0"/>
-          <a:chExt cx="0" cy="0"/>
-        </a:xfrm>
-      </p:grpSpPr>
-      <p:sp>
-        <p:nvSpPr>
-          <p:cNvPr id="2" name="Title 1">
-            <a:extLst>
-              <a:ext uri="{FF2B5EF4-FFF2-40B4-BE49-F238E27FC236}">
-                <a16:creationId xmlns:a16="http://schemas.microsoft.com/office/drawing/2014/main" id="{311C424B-4F60-03EA-57A9-C4318A90D1A8}"/>
-              </a:ext>
-            </a:extLst>
-          </p:cNvPr>
-          <p:cNvSpPr>
-            <a:spLocks noGrp="1"/>
-          </p:cNvSpPr>
-          <p:nvPr>
-            <p:ph type="title"/>
-          </p:nvPr>
-        </p:nvSpPr>
-        <p:spPr/>
-        <p:txBody>
-          <a:bodyPr/>
-          <a:lstStyle/>
-          <a:p>
-            <a:r>
-              <a:rPr lang="en-AU" dirty="0"/>
-              <a:t>Regex in </a:t>
-            </a:r>
-            <a:r>
-              <a:rPr lang="en-AU" dirty="0" err="1"/>
-              <a:t>splunk</a:t>
-            </a:r>
-            <a:endParaRPr lang="en-AU" dirty="0"/>
-          </a:p>
-        </p:txBody>
-      </p:sp>
-      <p:sp>
-        <p:nvSpPr>
-          <p:cNvPr id="3" name="Content Placeholder 2">
-            <a:extLst>
-              <a:ext uri="{FF2B5EF4-FFF2-40B4-BE49-F238E27FC236}">
-                <a16:creationId xmlns:a16="http://schemas.microsoft.com/office/drawing/2014/main" id="{0BE113D1-625D-E148-8A2F-8E8922728008}"/>
-              </a:ext>
-            </a:extLst>
-          </p:cNvPr>
-          <p:cNvSpPr>
-            <a:spLocks noGrp="1"/>
-          </p:cNvSpPr>
-          <p:nvPr>
-            <p:ph idx="1"/>
-          </p:nvPr>
-        </p:nvSpPr>
-        <p:spPr/>
-        <p:txBody>
-          <a:bodyPr/>
-          <a:lstStyle/>
-          <a:p>
-            <a:r>
-              <a:rPr lang="en-AU" dirty="0"/>
-              <a:t>If your events has too many strings where it is not able to properly extract values, you can regex events to get better filters. </a:t>
-            </a:r>
-          </a:p>
-          <a:p>
-            <a:pPr marL="0" indent="0">
-              <a:buNone/>
-            </a:pPr>
-            <a:endParaRPr lang="en-AU" dirty="0"/>
-          </a:p>
-          <a:p>
-            <a:r>
-              <a:rPr lang="en-AU" dirty="0"/>
-              <a:t>If your not strong with regex its okay AI is your best friend.</a:t>
-            </a:r>
-          </a:p>
-          <a:p>
-            <a:endParaRPr lang="en-AU" dirty="0"/>
-          </a:p>
-          <a:p>
-            <a:r>
-              <a:rPr lang="en-AU" dirty="0"/>
-              <a:t>If you want to see more regex examples look at the </a:t>
-            </a:r>
-            <a:r>
-              <a:rPr lang="en-AU" dirty="0" err="1"/>
-              <a:t>splunk</a:t>
-            </a:r>
-            <a:r>
-              <a:rPr lang="en-AU" dirty="0"/>
-              <a:t> Lab demo for more complicated regex queries</a:t>
-            </a:r>
-          </a:p>
-        </p:txBody>
-      </p:sp>
-    </p:spTree>
-    <p:extLst>
-      <p:ext uri="{BB962C8B-B14F-4D97-AF65-F5344CB8AC3E}">
-        <p14:creationId xmlns:p14="http://schemas.microsoft.com/office/powerpoint/2010/main" val="2712621605"/>
-      </p:ext>
-    </p:extLst>
-  </p:cSld>
-  <p:clrMapOvr>
-    <a:masterClrMapping/>
-  </p:clrMapOvr>
-</p:sld>
-</file>
-
-<file path=ppt/slides/slide15.xml><?xml version="1.0" encoding="utf-8"?>
-<p:sld xmlns:a="http://schemas.openxmlformats.org/drawingml/2006/main" xmlns:r="http://schemas.openxmlformats.org/officeDocument/2006/relationships" xmlns:p="http://schemas.openxmlformats.org/presentationml/2006/main">
-  <p:cSld>
-    <p:spTree>
-      <p:nvGrpSpPr>
-        <p:cNvPr id="1" name=""/>
-        <p:cNvGrpSpPr/>
-        <p:nvPr/>
-      </p:nvGrpSpPr>
-      <p:grpSpPr>
-        <a:xfrm>
-          <a:off x="0" y="0"/>
-          <a:ext cx="0" cy="0"/>
-          <a:chOff x="0" y="0"/>
-          <a:chExt cx="0" cy="0"/>
-        </a:xfrm>
-      </p:grpSpPr>
-      <p:sp>
-        <p:nvSpPr>
-          <p:cNvPr id="2" name="Title 1">
-            <a:extLst>
-              <a:ext uri="{FF2B5EF4-FFF2-40B4-BE49-F238E27FC236}">
-                <a16:creationId xmlns:a16="http://schemas.microsoft.com/office/drawing/2014/main" id="{D806CF57-0E44-E153-E9AD-741B7CFDB4ED}"/>
-              </a:ext>
-            </a:extLst>
-          </p:cNvPr>
-          <p:cNvSpPr>
-            <a:spLocks noGrp="1"/>
-          </p:cNvSpPr>
-          <p:nvPr>
-            <p:ph type="title"/>
-          </p:nvPr>
-        </p:nvSpPr>
-        <p:spPr/>
-        <p:txBody>
-          <a:bodyPr/>
-          <a:lstStyle/>
-          <a:p>
-            <a:r>
-              <a:rPr lang="en-AU" dirty="0"/>
-              <a:t>Demo regex</a:t>
-            </a:r>
-          </a:p>
-        </p:txBody>
-      </p:sp>
-      <p:sp>
-        <p:nvSpPr>
-          <p:cNvPr id="3" name="Content Placeholder 2">
-            <a:extLst>
-              <a:ext uri="{FF2B5EF4-FFF2-40B4-BE49-F238E27FC236}">
-                <a16:creationId xmlns:a16="http://schemas.microsoft.com/office/drawing/2014/main" id="{C5DE2728-F8BE-2E96-0A43-3C9C89C19681}"/>
-              </a:ext>
-            </a:extLst>
-          </p:cNvPr>
-          <p:cNvSpPr>
-            <a:spLocks noGrp="1"/>
-          </p:cNvSpPr>
-          <p:nvPr>
-            <p:ph idx="1"/>
-          </p:nvPr>
-        </p:nvSpPr>
-        <p:spPr/>
-        <p:txBody>
-          <a:bodyPr/>
-          <a:lstStyle/>
-          <a:p>
-            <a:r>
-              <a:rPr lang="en-AU" dirty="0"/>
-              <a:t>Show any events that contain the computer name with the string HCM</a:t>
-            </a:r>
-          </a:p>
-          <a:p>
-            <a:endParaRPr lang="en-AU" dirty="0"/>
-          </a:p>
-          <a:p>
-            <a:pPr marL="0" indent="0">
-              <a:buNone/>
-            </a:pPr>
-            <a:endParaRPr lang="en-AU" dirty="0"/>
-          </a:p>
-        </p:txBody>
-      </p:sp>
-      <p:pic>
-        <p:nvPicPr>
-          <p:cNvPr id="4" name="Picture 3">
-            <a:extLst>
-              <a:ext uri="{FF2B5EF4-FFF2-40B4-BE49-F238E27FC236}">
-                <a16:creationId xmlns:a16="http://schemas.microsoft.com/office/drawing/2014/main" id="{15270B2D-A706-E811-5589-BBC5BD3AF602}"/>
-              </a:ext>
-            </a:extLst>
-          </p:cNvPr>
-          <p:cNvPicPr>
-            <a:picLocks noChangeAspect="1"/>
-          </p:cNvPicPr>
-          <p:nvPr/>
-        </p:nvPicPr>
-        <p:blipFill>
-          <a:blip r:embed="rId2"/>
-          <a:stretch>
-            <a:fillRect/>
-          </a:stretch>
-        </p:blipFill>
-        <p:spPr>
-          <a:xfrm>
-            <a:off x="3112471" y="3429000"/>
-            <a:ext cx="5967058" cy="1682486"/>
-          </a:xfrm>
-          <a:prstGeom prst="rect">
-            <a:avLst/>
-          </a:prstGeom>
-          <a:ln w="25400">
-            <a:solidFill>
-              <a:schemeClr val="tx1"/>
-            </a:solidFill>
-          </a:ln>
-        </p:spPr>
-      </p:pic>
-    </p:spTree>
-    <p:extLst>
-      <p:ext uri="{BB962C8B-B14F-4D97-AF65-F5344CB8AC3E}">
-        <p14:creationId xmlns:p14="http://schemas.microsoft.com/office/powerpoint/2010/main" val="2312635054"/>
-      </p:ext>
-    </p:extLst>
-  </p:cSld>
-  <p:clrMapOvr>
-    <a:masterClrMapping/>
-  </p:clrMapOvr>
-</p:sld>
-</file>
-
-<file path=ppt/slides/slide16.xml><?xml version="1.0" encoding="utf-8"?>
-<p:sld xmlns:a="http://schemas.openxmlformats.org/drawingml/2006/main" xmlns:r="http://schemas.openxmlformats.org/officeDocument/2006/relationships" xmlns:p="http://schemas.openxmlformats.org/presentationml/2006/main">
-  <p:cSld>
-    <p:spTree>
-      <p:nvGrpSpPr>
-        <p:cNvPr id="1" name=""/>
-        <p:cNvGrpSpPr/>
-        <p:nvPr/>
-      </p:nvGrpSpPr>
-      <p:grpSpPr>
-        <a:xfrm>
-          <a:off x="0" y="0"/>
-          <a:ext cx="0" cy="0"/>
-          <a:chOff x="0" y="0"/>
-          <a:chExt cx="0" cy="0"/>
-        </a:xfrm>
-      </p:grpSpPr>
-      <p:sp>
-        <p:nvSpPr>
-          <p:cNvPr id="2" name="Title 1">
-            <a:extLst>
-              <a:ext uri="{FF2B5EF4-FFF2-40B4-BE49-F238E27FC236}">
-                <a16:creationId xmlns:a16="http://schemas.microsoft.com/office/drawing/2014/main" id="{B881D264-8733-0EF3-C8CC-B7A375921B77}"/>
-              </a:ext>
-            </a:extLst>
-          </p:cNvPr>
-          <p:cNvSpPr>
-            <a:spLocks noGrp="1"/>
-          </p:cNvSpPr>
-          <p:nvPr>
-            <p:ph type="title"/>
-          </p:nvPr>
-        </p:nvSpPr>
-        <p:spPr/>
-        <p:txBody>
-          <a:bodyPr/>
-          <a:lstStyle/>
-          <a:p>
-            <a:r>
-              <a:rPr lang="en-AU" dirty="0"/>
-              <a:t>Baselining</a:t>
-            </a:r>
-          </a:p>
-        </p:txBody>
-      </p:sp>
-      <p:sp>
-        <p:nvSpPr>
-          <p:cNvPr id="3" name="Content Placeholder 2">
-            <a:extLst>
-              <a:ext uri="{FF2B5EF4-FFF2-40B4-BE49-F238E27FC236}">
-                <a16:creationId xmlns:a16="http://schemas.microsoft.com/office/drawing/2014/main" id="{B92AC551-11EA-69E8-93ED-42FC9CDCC07B}"/>
-              </a:ext>
-            </a:extLst>
-          </p:cNvPr>
-          <p:cNvSpPr>
-            <a:spLocks noGrp="1"/>
-          </p:cNvSpPr>
-          <p:nvPr>
-            <p:ph idx="1"/>
-          </p:nvPr>
-        </p:nvSpPr>
-        <p:spPr/>
-        <p:txBody>
-          <a:bodyPr/>
-          <a:lstStyle/>
-          <a:p>
-            <a:r>
-              <a:rPr lang="en-AU" dirty="0"/>
-              <a:t>Whenever you go to a network the first step you conduct is a baseline. </a:t>
-            </a:r>
-          </a:p>
-          <a:p>
-            <a:endParaRPr lang="en-AU" dirty="0"/>
-          </a:p>
-          <a:p>
-            <a:r>
-              <a:rPr lang="en-AU" dirty="0"/>
-              <a:t>In </a:t>
-            </a:r>
-            <a:r>
-              <a:rPr lang="en-AU" dirty="0" err="1"/>
-              <a:t>splunk</a:t>
-            </a:r>
-            <a:r>
-              <a:rPr lang="en-AU" dirty="0"/>
-              <a:t> you are able to get services, schedule task and other artefacts and baseline them. </a:t>
-            </a:r>
-          </a:p>
-          <a:p>
-            <a:endParaRPr lang="en-AU" dirty="0"/>
-          </a:p>
-          <a:p>
-            <a:r>
-              <a:rPr lang="en-AU" dirty="0"/>
-              <a:t>You can do this by making CSV and for future searches you compare the output to the CSV any new unique events will flag it. </a:t>
-            </a:r>
-          </a:p>
-        </p:txBody>
-      </p:sp>
-    </p:spTree>
-    <p:extLst>
-      <p:ext uri="{BB962C8B-B14F-4D97-AF65-F5344CB8AC3E}">
-        <p14:creationId xmlns:p14="http://schemas.microsoft.com/office/powerpoint/2010/main" val="1719264778"/>
-      </p:ext>
-    </p:extLst>
-  </p:cSld>
-  <p:clrMapOvr>
-    <a:masterClrMapping/>
-  </p:clrMapOvr>
-</p:sld>
-</file>
-
-<file path=ppt/slides/slide17.xml><?xml version="1.0" encoding="utf-8"?>
-<p:sld xmlns:a="http://schemas.openxmlformats.org/drawingml/2006/main" xmlns:r="http://schemas.openxmlformats.org/officeDocument/2006/relationships" xmlns:p="http://schemas.openxmlformats.org/presentationml/2006/main">
-  <p:cSld>
-    <p:spTree>
-      <p:nvGrpSpPr>
-        <p:cNvPr id="1" name=""/>
-        <p:cNvGrpSpPr/>
-        <p:nvPr/>
-      </p:nvGrpSpPr>
-      <p:grpSpPr>
-        <a:xfrm>
-          <a:off x="0" y="0"/>
-          <a:ext cx="0" cy="0"/>
-          <a:chOff x="0" y="0"/>
-          <a:chExt cx="0" cy="0"/>
-        </a:xfrm>
-      </p:grpSpPr>
-      <p:sp>
-        <p:nvSpPr>
-          <p:cNvPr id="2" name="Title 1">
-            <a:extLst>
-              <a:ext uri="{FF2B5EF4-FFF2-40B4-BE49-F238E27FC236}">
-                <a16:creationId xmlns:a16="http://schemas.microsoft.com/office/drawing/2014/main" id="{43B2F14E-AE11-45B2-ADA3-45181DBB5FBD}"/>
-              </a:ext>
-            </a:extLst>
-          </p:cNvPr>
-          <p:cNvSpPr>
-            <a:spLocks noGrp="1"/>
-          </p:cNvSpPr>
-          <p:nvPr>
-            <p:ph type="title"/>
-          </p:nvPr>
-        </p:nvSpPr>
-        <p:spPr/>
-        <p:txBody>
-          <a:bodyPr/>
-          <a:lstStyle/>
-          <a:p>
-            <a:r>
-              <a:rPr lang="en-AU" dirty="0"/>
-              <a:t>Demo Baseline</a:t>
-            </a:r>
-          </a:p>
-        </p:txBody>
-      </p:sp>
-      <p:sp>
-        <p:nvSpPr>
-          <p:cNvPr id="3" name="Content Placeholder 2">
-            <a:extLst>
-              <a:ext uri="{FF2B5EF4-FFF2-40B4-BE49-F238E27FC236}">
-                <a16:creationId xmlns:a16="http://schemas.microsoft.com/office/drawing/2014/main" id="{E2711016-C1F9-AB78-C1DD-85DE27715244}"/>
-              </a:ext>
-            </a:extLst>
-          </p:cNvPr>
-          <p:cNvSpPr>
-            <a:spLocks noGrp="1"/>
-          </p:cNvSpPr>
-          <p:nvPr>
-            <p:ph idx="1"/>
-          </p:nvPr>
-        </p:nvSpPr>
-        <p:spPr/>
-        <p:txBody>
-          <a:bodyPr/>
-          <a:lstStyle/>
-          <a:p>
-            <a:r>
-              <a:rPr lang="en-AU" dirty="0"/>
-              <a:t>Making the CSV and the </a:t>
-            </a:r>
-            <a:r>
-              <a:rPr lang="en-AU" dirty="0" err="1"/>
-              <a:t>Computename</a:t>
-            </a:r>
-            <a:r>
-              <a:rPr lang="en-AU" dirty="0"/>
-              <a:t> and command</a:t>
-            </a:r>
-          </a:p>
-          <a:p>
-            <a:endParaRPr lang="en-AU" dirty="0"/>
-          </a:p>
-          <a:p>
-            <a:endParaRPr lang="en-AU" dirty="0"/>
-          </a:p>
-          <a:p>
-            <a:endParaRPr lang="en-AU" dirty="0"/>
-          </a:p>
-          <a:p>
-            <a:r>
-              <a:rPr lang="en-AU" dirty="0"/>
-              <a:t>Show where to see the json_host.csv file</a:t>
-            </a:r>
-          </a:p>
-          <a:p>
-            <a:r>
-              <a:rPr lang="en-AU" dirty="0"/>
-              <a:t>Compare the csv with latest filters</a:t>
-            </a:r>
-          </a:p>
-          <a:p>
-            <a:endParaRPr lang="en-AU" dirty="0"/>
-          </a:p>
-          <a:p>
-            <a:endParaRPr lang="en-AU" dirty="0"/>
-          </a:p>
-        </p:txBody>
-      </p:sp>
-      <p:pic>
-        <p:nvPicPr>
-          <p:cNvPr id="4" name="Picture 3">
-            <a:extLst>
-              <a:ext uri="{FF2B5EF4-FFF2-40B4-BE49-F238E27FC236}">
-                <a16:creationId xmlns:a16="http://schemas.microsoft.com/office/drawing/2014/main" id="{B67AA05B-895E-2334-B3F3-396EF4B60BF9}"/>
-              </a:ext>
-            </a:extLst>
-          </p:cNvPr>
-          <p:cNvPicPr>
-            <a:picLocks noChangeAspect="1"/>
-          </p:cNvPicPr>
-          <p:nvPr/>
-        </p:nvPicPr>
-        <p:blipFill>
-          <a:blip r:embed="rId2"/>
-          <a:stretch>
-            <a:fillRect/>
-          </a:stretch>
-        </p:blipFill>
-        <p:spPr>
-          <a:xfrm>
-            <a:off x="3264112" y="2743049"/>
-            <a:ext cx="5731510" cy="742950"/>
-          </a:xfrm>
-          <a:prstGeom prst="rect">
-            <a:avLst/>
-          </a:prstGeom>
-          <a:ln w="25400">
-            <a:solidFill>
-              <a:schemeClr val="tx1"/>
-            </a:solidFill>
-          </a:ln>
-        </p:spPr>
-      </p:pic>
-      <p:pic>
-        <p:nvPicPr>
-          <p:cNvPr id="5" name="Picture 4">
-            <a:extLst>
-              <a:ext uri="{FF2B5EF4-FFF2-40B4-BE49-F238E27FC236}">
-                <a16:creationId xmlns:a16="http://schemas.microsoft.com/office/drawing/2014/main" id="{3A193AB3-06D1-A3BA-8162-B809D05EAC3D}"/>
-              </a:ext>
-            </a:extLst>
-          </p:cNvPr>
-          <p:cNvPicPr>
-            <a:picLocks noChangeAspect="1"/>
-          </p:cNvPicPr>
-          <p:nvPr/>
-        </p:nvPicPr>
-        <p:blipFill>
-          <a:blip r:embed="rId3"/>
-          <a:stretch>
-            <a:fillRect/>
-          </a:stretch>
-        </p:blipFill>
-        <p:spPr>
-          <a:xfrm>
-            <a:off x="2864922" y="5222889"/>
-            <a:ext cx="7161214" cy="800539"/>
-          </a:xfrm>
-          <a:prstGeom prst="rect">
-            <a:avLst/>
-          </a:prstGeom>
-          <a:ln w="25400">
-            <a:solidFill>
-              <a:schemeClr val="tx1"/>
-            </a:solidFill>
-          </a:ln>
-        </p:spPr>
-      </p:pic>
-    </p:spTree>
-    <p:extLst>
-      <p:ext uri="{BB962C8B-B14F-4D97-AF65-F5344CB8AC3E}">
-        <p14:creationId xmlns:p14="http://schemas.microsoft.com/office/powerpoint/2010/main" val="3710649425"/>
-      </p:ext>
-    </p:extLst>
-  </p:cSld>
-  <p:clrMapOvr>
-    <a:masterClrMapping/>
-  </p:clrMapOvr>
-</p:sld>
-</file>
-
-<file path=ppt/slides/slide18.xml><?xml version="1.0" encoding="utf-8"?>
-<p:sld xmlns:a="http://schemas.openxmlformats.org/drawingml/2006/main" xmlns:r="http://schemas.openxmlformats.org/officeDocument/2006/relationships" xmlns:p="http://schemas.openxmlformats.org/presentationml/2006/main">
-  <p:cSld>
-    <p:spTree>
-      <p:nvGrpSpPr>
-        <p:cNvPr id="1" name=""/>
-        <p:cNvGrpSpPr/>
-        <p:nvPr/>
-      </p:nvGrpSpPr>
-      <p:grpSpPr>
-        <a:xfrm>
-          <a:off x="0" y="0"/>
-          <a:ext cx="0" cy="0"/>
-          <a:chOff x="0" y="0"/>
-          <a:chExt cx="0" cy="0"/>
-        </a:xfrm>
-      </p:grpSpPr>
-      <p:sp>
-        <p:nvSpPr>
-          <p:cNvPr id="2" name="Title 1">
-            <a:extLst>
-              <a:ext uri="{FF2B5EF4-FFF2-40B4-BE49-F238E27FC236}">
-                <a16:creationId xmlns:a16="http://schemas.microsoft.com/office/drawing/2014/main" id="{9C489B2A-9BEC-64C5-305C-30946A11ECC2}"/>
-              </a:ext>
-            </a:extLst>
-          </p:cNvPr>
-          <p:cNvSpPr>
-            <a:spLocks noGrp="1"/>
-          </p:cNvSpPr>
-          <p:nvPr>
-            <p:ph type="title"/>
-          </p:nvPr>
-        </p:nvSpPr>
-        <p:spPr/>
-        <p:txBody>
-          <a:bodyPr/>
-          <a:lstStyle/>
-          <a:p>
-            <a:r>
-              <a:rPr lang="en-AU" dirty="0"/>
-              <a:t>Lab Baseline</a:t>
-            </a:r>
-          </a:p>
-        </p:txBody>
-      </p:sp>
-      <p:sp>
-        <p:nvSpPr>
-          <p:cNvPr id="3" name="Content Placeholder 2">
-            <a:extLst>
-              <a:ext uri="{FF2B5EF4-FFF2-40B4-BE49-F238E27FC236}">
-                <a16:creationId xmlns:a16="http://schemas.microsoft.com/office/drawing/2014/main" id="{205DF493-2E66-C567-FD48-BA0804EB10B6}"/>
-              </a:ext>
-            </a:extLst>
-          </p:cNvPr>
-          <p:cNvSpPr>
-            <a:spLocks noGrp="1"/>
-          </p:cNvSpPr>
-          <p:nvPr>
-            <p:ph idx="1"/>
-          </p:nvPr>
-        </p:nvSpPr>
-        <p:spPr/>
-        <p:txBody>
-          <a:bodyPr/>
-          <a:lstStyle/>
-          <a:p>
-            <a:r>
-              <a:rPr lang="en-AU" dirty="0"/>
-              <a:t>Make a baseline on any of the sources you currently have.</a:t>
-            </a:r>
-          </a:p>
-          <a:p>
-            <a:pPr marL="0" indent="0">
-              <a:buNone/>
-            </a:pPr>
-            <a:endParaRPr lang="en-AU" dirty="0"/>
-          </a:p>
-          <a:p>
-            <a:r>
-              <a:rPr lang="en-AU" dirty="0"/>
-              <a:t>Using the commands in the previous slide figure out how to make the CSV and test it. </a:t>
-            </a:r>
-          </a:p>
-        </p:txBody>
-      </p:sp>
-    </p:spTree>
-    <p:extLst>
-      <p:ext uri="{BB962C8B-B14F-4D97-AF65-F5344CB8AC3E}">
-        <p14:creationId xmlns:p14="http://schemas.microsoft.com/office/powerpoint/2010/main" val="2105736056"/>
-      </p:ext>
-    </p:extLst>
-  </p:cSld>
-  <p:clrMapOvr>
-    <a:masterClrMapping/>
-  </p:clrMapOvr>
-</p:sld>
-</file>
-
-<file path=ppt/slides/slide19.xml><?xml version="1.0" encoding="utf-8"?>
-<p:sld xmlns:a="http://schemas.openxmlformats.org/drawingml/2006/main" xmlns:r="http://schemas.openxmlformats.org/officeDocument/2006/relationships" xmlns:p="http://schemas.openxmlformats.org/presentationml/2006/main">
-  <p:cSld>
-    <p:spTree>
-      <p:nvGrpSpPr>
-        <p:cNvPr id="1" name=""/>
-        <p:cNvGrpSpPr/>
-        <p:nvPr/>
-      </p:nvGrpSpPr>
-      <p:grpSpPr>
-        <a:xfrm>
-          <a:off x="0" y="0"/>
-          <a:ext cx="0" cy="0"/>
-          <a:chOff x="0" y="0"/>
-          <a:chExt cx="0" cy="0"/>
-        </a:xfrm>
-      </p:grpSpPr>
-      <p:sp>
-        <p:nvSpPr>
-          <p:cNvPr id="2" name="Title 1">
-            <a:extLst>
-              <a:ext uri="{FF2B5EF4-FFF2-40B4-BE49-F238E27FC236}">
                 <a16:creationId xmlns:a16="http://schemas.microsoft.com/office/drawing/2014/main" id="{8E7A6994-1E0E-48A5-9938-3C665347D46B}"/>
               </a:ext>
             </a:extLst>
@@ -4664,13 +5019,7 @@
           <a:p>
             <a:r>
               <a:rPr lang="en-US" dirty="0"/>
-              <a:t>Dashboards can also be used to help drill down on important data for further analysis.</a:t>
-            </a:r>
-          </a:p>
-          <a:p>
-            <a:r>
-              <a:rPr lang="en-US" dirty="0"/>
-              <a:t>Dashboards are very useful in creating baselines to help determine what is and isn’t normal on a network.</a:t>
+              <a:t>Dashboards can also be used to help drill down on important data for further analysis and are very useful in creating baselines to help determine what is and isn’t normal on a network.</a:t>
             </a:r>
           </a:p>
           <a:p>
@@ -4681,41 +5030,6 @@
           </a:p>
         </p:txBody>
       </p:sp>
-      <p:pic>
-        <p:nvPicPr>
-          <p:cNvPr id="5" name="Picture 4">
-            <a:extLst>
-              <a:ext uri="{FF2B5EF4-FFF2-40B4-BE49-F238E27FC236}">
-                <a16:creationId xmlns:a16="http://schemas.microsoft.com/office/drawing/2014/main" id="{966BB166-1D1A-5AED-3AF2-EDEAC0F53F72}"/>
-              </a:ext>
-            </a:extLst>
-          </p:cNvPr>
-          <p:cNvPicPr>
-            <a:picLocks noChangeAspect="1"/>
-          </p:cNvPicPr>
-          <p:nvPr/>
-        </p:nvPicPr>
-        <p:blipFill>
-          <a:blip r:embed="rId2"/>
-          <a:stretch>
-            <a:fillRect/>
-          </a:stretch>
-        </p:blipFill>
-        <p:spPr>
-          <a:xfrm>
-            <a:off x="-9656" y="4775200"/>
-            <a:ext cx="12161899" cy="1822174"/>
-          </a:xfrm>
-          <a:prstGeom prst="rect">
-            <a:avLst/>
-          </a:prstGeom>
-          <a:ln w="38100">
-            <a:solidFill>
-              <a:schemeClr val="tx1"/>
-            </a:solidFill>
-          </a:ln>
-        </p:spPr>
-      </p:pic>
     </p:spTree>
     <p:extLst>
       <p:ext uri="{BB962C8B-B14F-4D97-AF65-F5344CB8AC3E}">
@@ -4840,186 +5154,6 @@
 </p:sld>
 </file>
 
-<file path=ppt/slides/slide20.xml><?xml version="1.0" encoding="utf-8"?>
-<p:sld xmlns:a="http://schemas.openxmlformats.org/drawingml/2006/main" xmlns:r="http://schemas.openxmlformats.org/officeDocument/2006/relationships" xmlns:p="http://schemas.openxmlformats.org/presentationml/2006/main">
-  <p:cSld>
-    <p:spTree>
-      <p:nvGrpSpPr>
-        <p:cNvPr id="1" name=""/>
-        <p:cNvGrpSpPr/>
-        <p:nvPr/>
-      </p:nvGrpSpPr>
-      <p:grpSpPr>
-        <a:xfrm>
-          <a:off x="0" y="0"/>
-          <a:ext cx="0" cy="0"/>
-          <a:chOff x="0" y="0"/>
-          <a:chExt cx="0" cy="0"/>
-        </a:xfrm>
-      </p:grpSpPr>
-      <p:sp>
-        <p:nvSpPr>
-          <p:cNvPr id="2" name="Title 1">
-            <a:extLst>
-              <a:ext uri="{FF2B5EF4-FFF2-40B4-BE49-F238E27FC236}">
-                <a16:creationId xmlns:a16="http://schemas.microsoft.com/office/drawing/2014/main" id="{86905A66-7EF6-64F4-0942-436BBF0ACAF6}"/>
-              </a:ext>
-            </a:extLst>
-          </p:cNvPr>
-          <p:cNvSpPr>
-            <a:spLocks noGrp="1"/>
-          </p:cNvSpPr>
-          <p:nvPr>
-            <p:ph type="title"/>
-          </p:nvPr>
-        </p:nvSpPr>
-        <p:spPr/>
-        <p:txBody>
-          <a:bodyPr/>
-          <a:lstStyle/>
-          <a:p>
-            <a:r>
-              <a:rPr lang="en-AU" dirty="0"/>
-              <a:t>Demo Making a </a:t>
-            </a:r>
-            <a:r>
-              <a:rPr lang="en-AU" dirty="0" err="1"/>
-              <a:t>splunk</a:t>
-            </a:r>
-            <a:r>
-              <a:rPr lang="en-AU" dirty="0"/>
-              <a:t> dashboard</a:t>
-            </a:r>
-          </a:p>
-        </p:txBody>
-      </p:sp>
-      <p:sp>
-        <p:nvSpPr>
-          <p:cNvPr id="3" name="Content Placeholder 2">
-            <a:extLst>
-              <a:ext uri="{FF2B5EF4-FFF2-40B4-BE49-F238E27FC236}">
-                <a16:creationId xmlns:a16="http://schemas.microsoft.com/office/drawing/2014/main" id="{3C3C51D1-1BF4-41F4-0300-EA87C364F26B}"/>
-              </a:ext>
-            </a:extLst>
-          </p:cNvPr>
-          <p:cNvSpPr>
-            <a:spLocks noGrp="1"/>
-          </p:cNvSpPr>
-          <p:nvPr>
-            <p:ph idx="1"/>
-          </p:nvPr>
-        </p:nvSpPr>
-        <p:spPr/>
-        <p:txBody>
-          <a:bodyPr/>
-          <a:lstStyle/>
-          <a:p>
-            <a:r>
-              <a:rPr lang="en-AU" dirty="0"/>
-              <a:t>Demo on how to make a dashboard look at Splunk lab demo. </a:t>
-            </a:r>
-          </a:p>
-        </p:txBody>
-      </p:sp>
-    </p:spTree>
-    <p:extLst>
-      <p:ext uri="{BB962C8B-B14F-4D97-AF65-F5344CB8AC3E}">
-        <p14:creationId xmlns:p14="http://schemas.microsoft.com/office/powerpoint/2010/main" val="4220924254"/>
-      </p:ext>
-    </p:extLst>
-  </p:cSld>
-  <p:clrMapOvr>
-    <a:masterClrMapping/>
-  </p:clrMapOvr>
-</p:sld>
-</file>
-
-<file path=ppt/slides/slide21.xml><?xml version="1.0" encoding="utf-8"?>
-<p:sld xmlns:a="http://schemas.openxmlformats.org/drawingml/2006/main" xmlns:r="http://schemas.openxmlformats.org/officeDocument/2006/relationships" xmlns:p="http://schemas.openxmlformats.org/presentationml/2006/main">
-  <p:cSld>
-    <p:spTree>
-      <p:nvGrpSpPr>
-        <p:cNvPr id="1" name=""/>
-        <p:cNvGrpSpPr/>
-        <p:nvPr/>
-      </p:nvGrpSpPr>
-      <p:grpSpPr>
-        <a:xfrm>
-          <a:off x="0" y="0"/>
-          <a:ext cx="0" cy="0"/>
-          <a:chOff x="0" y="0"/>
-          <a:chExt cx="0" cy="0"/>
-        </a:xfrm>
-      </p:grpSpPr>
-      <p:sp>
-        <p:nvSpPr>
-          <p:cNvPr id="2" name="Title 1">
-            <a:extLst>
-              <a:ext uri="{FF2B5EF4-FFF2-40B4-BE49-F238E27FC236}">
-                <a16:creationId xmlns:a16="http://schemas.microsoft.com/office/drawing/2014/main" id="{5943141E-7017-5724-AF7A-D3C8D19A3077}"/>
-              </a:ext>
-            </a:extLst>
-          </p:cNvPr>
-          <p:cNvSpPr>
-            <a:spLocks noGrp="1"/>
-          </p:cNvSpPr>
-          <p:nvPr>
-            <p:ph type="title"/>
-          </p:nvPr>
-        </p:nvSpPr>
-        <p:spPr/>
-        <p:txBody>
-          <a:bodyPr/>
-          <a:lstStyle/>
-          <a:p>
-            <a:r>
-              <a:rPr lang="en-AU" dirty="0"/>
-              <a:t>Demo Dropdown / searches </a:t>
-            </a:r>
-          </a:p>
-        </p:txBody>
-      </p:sp>
-      <p:sp>
-        <p:nvSpPr>
-          <p:cNvPr id="3" name="Content Placeholder 2">
-            <a:extLst>
-              <a:ext uri="{FF2B5EF4-FFF2-40B4-BE49-F238E27FC236}">
-                <a16:creationId xmlns:a16="http://schemas.microsoft.com/office/drawing/2014/main" id="{1D267D6F-7488-3BF8-0FA7-86143AD87C1D}"/>
-              </a:ext>
-            </a:extLst>
-          </p:cNvPr>
-          <p:cNvSpPr>
-            <a:spLocks noGrp="1"/>
-          </p:cNvSpPr>
-          <p:nvPr>
-            <p:ph idx="1"/>
-          </p:nvPr>
-        </p:nvSpPr>
-        <p:spPr/>
-        <p:txBody>
-          <a:bodyPr/>
-          <a:lstStyle/>
-          <a:p>
-            <a:r>
-              <a:rPr lang="en-AU" dirty="0"/>
-              <a:t>Show how to search quickly by making a dropdown menu and a search filter</a:t>
-            </a:r>
-          </a:p>
-        </p:txBody>
-      </p:sp>
-    </p:spTree>
-    <p:extLst>
-      <p:ext uri="{BB962C8B-B14F-4D97-AF65-F5344CB8AC3E}">
-        <p14:creationId xmlns:p14="http://schemas.microsoft.com/office/powerpoint/2010/main" val="1089203021"/>
-      </p:ext>
-    </p:extLst>
-  </p:cSld>
-  <p:clrMapOvr>
-    <a:masterClrMapping/>
-  </p:clrMapOvr>
-</p:sld>
-</file>
-
 <file path=ppt/slides/slide3.xml><?xml version="1.0" encoding="utf-8"?>
 <p:sld xmlns:a="http://schemas.openxmlformats.org/drawingml/2006/main" xmlns:r="http://schemas.openxmlformats.org/officeDocument/2006/relationships" xmlns:p="http://schemas.openxmlformats.org/presentationml/2006/main">
   <p:cSld>
@@ -5116,23 +5250,15 @@
             </a:r>
             <a:r>
               <a:rPr lang="en-US" dirty="0"/>
-              <a:t> “</a:t>
+              <a:t> </a:t>
             </a:r>
             <a:r>
               <a:rPr lang="en-AU" b="1" dirty="0"/>
-              <a:t>index=host </a:t>
-            </a:r>
-            <a:r>
-              <a:rPr lang="en-US" b="1" dirty="0"/>
-              <a:t>Artifact=</a:t>
-            </a:r>
-            <a:r>
-              <a:rPr lang="en-US" b="1" dirty="0" err="1"/>
-              <a:t>Generic.Client.Info</a:t>
+              <a:t>index=“host” </a:t>
             </a:r>
             <a:r>
               <a:rPr lang="en-AU" dirty="0"/>
-              <a:t>”– will return all data within the </a:t>
+              <a:t>will return all data within the </a:t>
             </a:r>
             <a:r>
               <a:rPr lang="en-AU" b="1" dirty="0"/>
@@ -5140,16 +5266,9 @@
             </a:r>
             <a:r>
               <a:rPr lang="en-AU" dirty="0"/>
-              <a:t> index that relates to the velociraptor artifact “</a:t>
-            </a:r>
-            <a:r>
-              <a:rPr lang="en-US" b="1" dirty="0" err="1"/>
-              <a:t>Generic.Client.Info</a:t>
-            </a:r>
-            <a:r>
-              <a:rPr lang="en-US" dirty="0"/>
-              <a:t>”</a:t>
-            </a:r>
+              <a:t> index.</a:t>
+            </a:r>
+            <a:endParaRPr lang="en-US" dirty="0"/>
           </a:p>
         </p:txBody>
       </p:sp>
@@ -5206,35 +5325,7 @@
           <a:p>
             <a:r>
               <a:rPr lang="en-AU" dirty="0"/>
-              <a:t>Demo intro and viewing source types</a:t>
-            </a:r>
-          </a:p>
-        </p:txBody>
-      </p:sp>
-      <p:sp>
-        <p:nvSpPr>
-          <p:cNvPr id="3" name="Content Placeholder 2">
-            <a:extLst>
-              <a:ext uri="{FF2B5EF4-FFF2-40B4-BE49-F238E27FC236}">
-                <a16:creationId xmlns:a16="http://schemas.microsoft.com/office/drawing/2014/main" id="{E3410602-4487-4787-8BFE-3ABFD0A10F66}"/>
-              </a:ext>
-            </a:extLst>
-          </p:cNvPr>
-          <p:cNvSpPr>
-            <a:spLocks noGrp="1"/>
-          </p:cNvSpPr>
-          <p:nvPr>
-            <p:ph idx="1"/>
-          </p:nvPr>
-        </p:nvSpPr>
-        <p:spPr/>
-        <p:txBody>
-          <a:bodyPr/>
-          <a:lstStyle/>
-          <a:p>
-            <a:r>
-              <a:rPr lang="en-AU" dirty="0"/>
-              <a:t>Moving around the </a:t>
+              <a:t>Demo - </a:t>
             </a:r>
             <a:r>
               <a:rPr lang="en-AU" dirty="0" err="1"/>
@@ -5242,16 +5333,44 @@
             </a:r>
             <a:r>
               <a:rPr lang="en-AU" dirty="0"/>
-              <a:t> homepage</a:t>
-            </a:r>
-          </a:p>
-          <a:p>
-            <a:endParaRPr lang="en-AU" dirty="0"/>
+              <a:t> homepage and viewing source types</a:t>
+            </a:r>
+          </a:p>
+        </p:txBody>
+      </p:sp>
+      <p:sp>
+        <p:nvSpPr>
+          <p:cNvPr id="3" name="Content Placeholder 2">
+            <a:extLst>
+              <a:ext uri="{FF2B5EF4-FFF2-40B4-BE49-F238E27FC236}">
+                <a16:creationId xmlns:a16="http://schemas.microsoft.com/office/drawing/2014/main" id="{E3410602-4487-4787-8BFE-3ABFD0A10F66}"/>
+              </a:ext>
+            </a:extLst>
+          </p:cNvPr>
+          <p:cNvSpPr>
+            <a:spLocks noGrp="1"/>
+          </p:cNvSpPr>
+          <p:nvPr>
+            <p:ph idx="1"/>
+          </p:nvPr>
+        </p:nvSpPr>
+        <p:spPr/>
+        <p:txBody>
+          <a:bodyPr/>
+          <a:lstStyle/>
+          <a:p>
+            <a:pPr marL="0" indent="0">
+              <a:buNone/>
+            </a:pPr>
+            <a:r>
+              <a:rPr lang="en-AU" b="1" dirty="0"/>
+              <a:t>Demo</a:t>
+            </a:r>
           </a:p>
           <a:p>
             <a:r>
               <a:rPr lang="en-AU" dirty="0"/>
-              <a:t>How to determine all the source types loaded into </a:t>
+              <a:t>Navigate to </a:t>
             </a:r>
             <a:r>
               <a:rPr lang="en-AU" dirty="0" err="1"/>
@@ -5259,13 +5378,46 @@
             </a:r>
             <a:r>
               <a:rPr lang="en-AU" dirty="0"/>
-              <a:t>.</a:t>
-            </a:r>
+              <a:t> homepage via </a:t>
+            </a:r>
+            <a:r>
+              <a:rPr lang="en-AU" b="1" dirty="0"/>
+              <a:t>Search&amp; Reporting</a:t>
+            </a:r>
+          </a:p>
+          <a:p>
+            <a:endParaRPr lang="en-AU" b="1" dirty="0"/>
           </a:p>
           <a:p>
             <a:endParaRPr lang="en-AU" dirty="0"/>
           </a:p>
           <a:p>
+            <a:pPr marL="0" indent="0">
+              <a:buNone/>
+            </a:pPr>
+            <a:r>
+              <a:rPr lang="en-AU" b="1" dirty="0"/>
+              <a:t>Viewing Source Types</a:t>
+            </a:r>
+          </a:p>
+          <a:p>
+            <a:r>
+              <a:rPr lang="en-AU" dirty="0"/>
+              <a:t>To determine source types loaded into </a:t>
+            </a:r>
+            <a:r>
+              <a:rPr lang="en-AU" dirty="0" err="1"/>
+              <a:t>splunk</a:t>
+            </a:r>
+            <a:r>
+              <a:rPr lang="en-AU" dirty="0"/>
+              <a:t> search:</a:t>
+            </a:r>
+          </a:p>
+          <a:p>
+            <a:pPr marL="0" indent="0">
+              <a:buNone/>
+            </a:pPr>
             <a:endParaRPr lang="en-AU" dirty="0"/>
           </a:p>
         </p:txBody>
@@ -5285,14 +5437,14 @@
           <p:nvPr/>
         </p:nvPicPr>
         <p:blipFill>
-          <a:blip r:embed="rId2"/>
+          <a:blip r:embed="rId3"/>
           <a:stretch>
             <a:fillRect/>
           </a:stretch>
         </p:blipFill>
         <p:spPr>
           <a:xfrm>
-            <a:off x="3230245" y="3839694"/>
+            <a:off x="1266974" y="4876799"/>
             <a:ext cx="5731510" cy="988060"/>
           </a:xfrm>
           <a:prstGeom prst="rect">
@@ -5387,22 +5539,14 @@
           <a:p>
             <a:r>
               <a:rPr lang="en-US" dirty="0"/>
-              <a:t>Fields in Splunk are pieces of information extracted from each event.</a:t>
-            </a:r>
-          </a:p>
-          <a:p>
-            <a:r>
-              <a:rPr lang="en-US" dirty="0"/>
-              <a:t>Fields allow searching, filtering, and analyzing data more effectively.</a:t>
-            </a:r>
-          </a:p>
-          <a:p>
+              <a:t>Fields allow searching, filtering, and analyzing data more efficiently &amp; effectively.</a:t>
+            </a:r>
             <a:endParaRPr lang="en-AU" dirty="0"/>
           </a:p>
           <a:p>
             <a:r>
               <a:rPr lang="en-AU" dirty="0"/>
-              <a:t>Can think of Fields like variables</a:t>
+              <a:t>Can think of fields like variables</a:t>
             </a:r>
           </a:p>
           <a:p>
@@ -5431,15 +5575,15 @@
           <p:nvPr/>
         </p:nvPicPr>
         <p:blipFill>
-          <a:blip r:embed="rId2"/>
+          <a:blip r:embed="rId3"/>
           <a:stretch>
             <a:fillRect/>
           </a:stretch>
         </p:blipFill>
         <p:spPr>
           <a:xfrm>
-            <a:off x="6163734" y="3244766"/>
-            <a:ext cx="5712906" cy="3564853"/>
+            <a:off x="1286436" y="3132707"/>
+            <a:ext cx="9022976" cy="3564853"/>
           </a:xfrm>
           <a:prstGeom prst="rect">
             <a:avLst/>
@@ -5525,22 +5669,19 @@
             <p:ph idx="1"/>
           </p:nvPr>
         </p:nvSpPr>
-        <p:spPr/>
+        <p:spPr>
+          <a:xfrm>
+            <a:off x="838200" y="1825624"/>
+            <a:ext cx="10515600" cy="4731929"/>
+          </a:xfrm>
+        </p:spPr>
         <p:txBody>
           <a:bodyPr/>
           <a:lstStyle/>
           <a:p>
             <a:r>
               <a:rPr lang="en-AU" dirty="0"/>
-              <a:t>Do a stats count by </a:t>
-            </a:r>
-            <a:r>
-              <a:rPr lang="en-AU" dirty="0" err="1"/>
-              <a:t>Src</a:t>
-            </a:r>
-            <a:r>
-              <a:rPr lang="en-AU" dirty="0"/>
-              <a:t> IP</a:t>
+              <a:t>stats count by source IP</a:t>
             </a:r>
           </a:p>
           <a:p>
@@ -5558,54 +5699,20 @@
           <a:p>
             <a:r>
               <a:rPr lang="en-AU" dirty="0"/>
-              <a:t>Do multiple stats count by with </a:t>
-            </a:r>
-            <a:r>
-              <a:rPr lang="en-AU" dirty="0" err="1"/>
-              <a:t>src</a:t>
-            </a:r>
+              <a:t>stats count by with source IP and destination IP</a:t>
+            </a:r>
+          </a:p>
+          <a:p>
+            <a:endParaRPr lang="en-AU" dirty="0"/>
+          </a:p>
+          <a:p>
+            <a:endParaRPr lang="en-AU" dirty="0"/>
+          </a:p>
+          <a:p>
             <a:r>
               <a:rPr lang="en-AU" dirty="0"/>
-              <a:t> </a:t>
-            </a:r>
-            <a:r>
-              <a:rPr lang="en-AU" dirty="0" err="1"/>
-              <a:t>ip</a:t>
-            </a:r>
-            <a:r>
-              <a:rPr lang="en-AU" dirty="0"/>
-              <a:t> and </a:t>
-            </a:r>
-            <a:r>
-              <a:rPr lang="en-AU" dirty="0" err="1"/>
-              <a:t>dst</a:t>
-            </a:r>
-            <a:r>
-              <a:rPr lang="en-AU" dirty="0"/>
-              <a:t> </a:t>
-            </a:r>
-            <a:r>
-              <a:rPr lang="en-AU" dirty="0" err="1"/>
-              <a:t>ip</a:t>
-            </a:r>
-            <a:endParaRPr lang="en-AU" dirty="0"/>
-          </a:p>
-          <a:p>
-            <a:endParaRPr lang="en-AU" dirty="0"/>
-          </a:p>
-          <a:p>
-            <a:endParaRPr lang="en-AU" dirty="0"/>
-          </a:p>
-          <a:p>
-            <a:r>
-              <a:rPr lang="en-AU" dirty="0"/>
-              <a:t>Give me the latest 5 events of a </a:t>
-            </a:r>
-            <a:r>
-              <a:rPr lang="en-AU" dirty="0" err="1"/>
-              <a:t>sourcetype</a:t>
-            </a:r>
-            <a:endParaRPr lang="en-AU" dirty="0"/>
+              <a:t>latest 5 events of a source type</a:t>
+            </a:r>
           </a:p>
           <a:p>
             <a:endParaRPr lang="en-AU" dirty="0"/>
@@ -5630,14 +5737,14 @@
           <p:nvPr/>
         </p:nvPicPr>
         <p:blipFill>
-          <a:blip r:embed="rId2"/>
+          <a:blip r:embed="rId3"/>
           <a:stretch>
             <a:fillRect/>
           </a:stretch>
         </p:blipFill>
         <p:spPr>
           <a:xfrm>
-            <a:off x="3094778" y="2445808"/>
+            <a:off x="1205018" y="2413288"/>
             <a:ext cx="5731510" cy="679450"/>
           </a:xfrm>
           <a:prstGeom prst="rect">
@@ -5665,14 +5772,14 @@
           <p:nvPr/>
         </p:nvPicPr>
         <p:blipFill>
-          <a:blip r:embed="rId3"/>
+          <a:blip r:embed="rId4"/>
           <a:stretch>
             <a:fillRect/>
           </a:stretch>
         </p:blipFill>
         <p:spPr>
           <a:xfrm>
-            <a:off x="3094778" y="4104987"/>
+            <a:off x="1205018" y="4000787"/>
             <a:ext cx="5731510" cy="602615"/>
           </a:xfrm>
           <a:prstGeom prst="rect">
@@ -5700,14 +5807,14 @@
           <p:nvPr/>
         </p:nvPicPr>
         <p:blipFill>
-          <a:blip r:embed="rId4"/>
+          <a:blip r:embed="rId5"/>
           <a:stretch>
             <a:fillRect/>
           </a:stretch>
         </p:blipFill>
         <p:spPr>
           <a:xfrm>
-            <a:off x="3889027" y="5402837"/>
+            <a:off x="1205018" y="5402837"/>
             <a:ext cx="4413945" cy="1090038"/>
           </a:xfrm>
           <a:prstGeom prst="rect">
@@ -5755,7 +5862,7 @@
           <p:cNvPr id="2" name="Title 1">
             <a:extLst>
               <a:ext uri="{FF2B5EF4-FFF2-40B4-BE49-F238E27FC236}">
-                <a16:creationId xmlns:a16="http://schemas.microsoft.com/office/drawing/2014/main" id="{84B455FF-3333-2009-0B7A-1C345EFB86EA}"/>
+                <a16:creationId xmlns:a16="http://schemas.microsoft.com/office/drawing/2014/main" id="{38099223-8C60-72F1-74F3-EB0D74064A42}"/>
               </a:ext>
             </a:extLst>
           </p:cNvPr>
@@ -5772,8 +5879,12 @@
           <a:lstStyle/>
           <a:p>
             <a:r>
+              <a:rPr lang="en-US" dirty="0"/>
+              <a:t>Searching in Splunk - </a:t>
+            </a:r>
+            <a:r>
               <a:rPr lang="en-AU" dirty="0"/>
-              <a:t>Lab Searches</a:t>
+              <a:t>Tables</a:t>
             </a:r>
           </a:p>
         </p:txBody>
@@ -5783,7 +5894,7 @@
           <p:cNvPr id="3" name="Content Placeholder 2">
             <a:extLst>
               <a:ext uri="{FF2B5EF4-FFF2-40B4-BE49-F238E27FC236}">
-                <a16:creationId xmlns:a16="http://schemas.microsoft.com/office/drawing/2014/main" id="{71D5BBC8-600E-7783-89CE-F7A620175915}"/>
+                <a16:creationId xmlns:a16="http://schemas.microsoft.com/office/drawing/2014/main" id="{BC815DDB-ED52-D88A-9A32-FC81EB36DFD5}"/>
               </a:ext>
             </a:extLst>
           </p:cNvPr>
@@ -5801,24 +5912,31 @@
           <a:p>
             <a:r>
               <a:rPr lang="en-AU" dirty="0"/>
-              <a:t>Find what file is located in the TEMP directory</a:t>
-            </a:r>
-          </a:p>
-          <a:p>
+              <a:t>Normal source types have too many fields to analyse at once. </a:t>
+            </a:r>
+          </a:p>
+          <a:p>
+            <a:pPr marL="0" indent="0">
+              <a:buNone/>
+            </a:pPr>
             <a:endParaRPr lang="en-AU" dirty="0"/>
           </a:p>
           <a:p>
             <a:r>
               <a:rPr lang="en-AU" dirty="0"/>
-              <a:t>In </a:t>
-            </a:r>
-            <a:r>
-              <a:rPr lang="en-AU" dirty="0" err="1"/>
-              <a:t>splunk</a:t>
-            </a:r>
+              <a:t>With the table function you are able to select which fields you want to view.</a:t>
+            </a:r>
+          </a:p>
+          <a:p>
+            <a:pPr marL="0" indent="0">
+              <a:buNone/>
+            </a:pPr>
+            <a:endParaRPr lang="en-AU" dirty="0"/>
+          </a:p>
+          <a:p>
             <a:r>
               <a:rPr lang="en-AU" dirty="0"/>
-              <a:t> you are able to do string searches</a:t>
+              <a:t>Helpful when generating dashboards as you can select only the important fields.</a:t>
             </a:r>
           </a:p>
         </p:txBody>
@@ -5826,7 +5944,7 @@
     </p:spTree>
     <p:extLst>
       <p:ext uri="{BB962C8B-B14F-4D97-AF65-F5344CB8AC3E}">
-        <p14:creationId xmlns:p14="http://schemas.microsoft.com/office/powerpoint/2010/main" val="4073885307"/>
+        <p14:creationId xmlns:p14="http://schemas.microsoft.com/office/powerpoint/2010/main" val="2372391513"/>
       </p:ext>
     </p:extLst>
   </p:cSld>
@@ -5858,7 +5976,7 @@
           <p:cNvPr id="2" name="Title 1">
             <a:extLst>
               <a:ext uri="{FF2B5EF4-FFF2-40B4-BE49-F238E27FC236}">
-                <a16:creationId xmlns:a16="http://schemas.microsoft.com/office/drawing/2014/main" id="{38099223-8C60-72F1-74F3-EB0D74064A42}"/>
+                <a16:creationId xmlns:a16="http://schemas.microsoft.com/office/drawing/2014/main" id="{157AE698-46F7-3E5F-F52A-65B076596BD7}"/>
               </a:ext>
             </a:extLst>
           </p:cNvPr>
@@ -5875,9 +5993,10 @@
           <a:lstStyle/>
           <a:p>
             <a:r>
-              <a:rPr lang="en-AU" dirty="0"/>
-              <a:t>Table</a:t>
-            </a:r>
+              <a:rPr lang="en-US" dirty="0"/>
+              <a:t>Logic Operators in Splunk </a:t>
+            </a:r>
+            <a:endParaRPr lang="en-AU" dirty="0"/>
           </a:p>
         </p:txBody>
       </p:sp>
@@ -5886,7 +6005,7 @@
           <p:cNvPr id="3" name="Content Placeholder 2">
             <a:extLst>
               <a:ext uri="{FF2B5EF4-FFF2-40B4-BE49-F238E27FC236}">
-                <a16:creationId xmlns:a16="http://schemas.microsoft.com/office/drawing/2014/main" id="{BC815DDB-ED52-D88A-9A32-FC81EB36DFD5}"/>
+                <a16:creationId xmlns:a16="http://schemas.microsoft.com/office/drawing/2014/main" id="{37FA90E8-A62A-85F1-C850-33791870187D}"/>
               </a:ext>
             </a:extLst>
           </p:cNvPr>
@@ -5899,36 +6018,50 @@
         </p:nvSpPr>
         <p:spPr/>
         <p:txBody>
-          <a:bodyPr/>
-          <a:lstStyle/>
-          <a:p>
-            <a:r>
-              <a:rPr lang="en-AU" dirty="0"/>
-              <a:t>Normal source types have too many fields to analyse at once. </a:t>
-            </a:r>
-          </a:p>
-          <a:p>
-            <a:pPr marL="0" indent="0">
-              <a:buNone/>
-            </a:pPr>
-            <a:endParaRPr lang="en-AU" dirty="0"/>
-          </a:p>
-          <a:p>
-            <a:r>
-              <a:rPr lang="en-AU" dirty="0"/>
-              <a:t>With the table function you are able to select which fields you want to view.</a:t>
-            </a:r>
-          </a:p>
-          <a:p>
-            <a:pPr marL="0" indent="0">
-              <a:buNone/>
-            </a:pPr>
-            <a:endParaRPr lang="en-AU" dirty="0"/>
-          </a:p>
-          <a:p>
-            <a:r>
-              <a:rPr lang="en-AU" dirty="0"/>
-              <a:t>Helpful when generating dashboards as you can select only the important fields.</a:t>
+          <a:bodyPr>
+            <a:normAutofit/>
+          </a:bodyPr>
+          <a:lstStyle/>
+          <a:p>
+            <a:r>
+              <a:rPr lang="en-US" dirty="0"/>
+              <a:t>Logical operators are used in Splunk searches to combine or refine conditions. They make searches more precise and enable more advanced filtering logic.</a:t>
+            </a:r>
+          </a:p>
+          <a:p>
+            <a:r>
+              <a:rPr lang="en-US" dirty="0"/>
+              <a:t>Common logical operators include AND, OR, and NOT.</a:t>
+            </a:r>
+          </a:p>
+          <a:p>
+            <a:r>
+              <a:rPr lang="en-US" b="1" dirty="0"/>
+              <a:t>AND</a:t>
+            </a:r>
+            <a:r>
+              <a:rPr lang="en-US" dirty="0"/>
+              <a:t> requires all conditions to be true (e.g., status=200 AND method=POST)</a:t>
+            </a:r>
+          </a:p>
+          <a:p>
+            <a:r>
+              <a:rPr lang="en-US" b="1" dirty="0"/>
+              <a:t>OR</a:t>
+            </a:r>
+            <a:r>
+              <a:rPr lang="en-US" dirty="0"/>
+              <a:t> allows any one of multiple conditions to be true (e.g., status=200 OR status=404)</a:t>
+            </a:r>
+          </a:p>
+          <a:p>
+            <a:r>
+              <a:rPr lang="en-US" b="1" dirty="0"/>
+              <a:t>NOT</a:t>
+            </a:r>
+            <a:r>
+              <a:rPr lang="en-US" dirty="0"/>
+              <a:t> excludes certain events from results (e.g., NOT status=200).</a:t>
             </a:r>
           </a:p>
         </p:txBody>
@@ -5936,7 +6069,7 @@
     </p:spTree>
     <p:extLst>
       <p:ext uri="{BB962C8B-B14F-4D97-AF65-F5344CB8AC3E}">
-        <p14:creationId xmlns:p14="http://schemas.microsoft.com/office/powerpoint/2010/main" val="2372391513"/>
+        <p14:creationId xmlns:p14="http://schemas.microsoft.com/office/powerpoint/2010/main" val="1396224906"/>
       </p:ext>
     </p:extLst>
   </p:cSld>
@@ -5968,7 +6101,7 @@
           <p:cNvPr id="2" name="Title 1">
             <a:extLst>
               <a:ext uri="{FF2B5EF4-FFF2-40B4-BE49-F238E27FC236}">
-                <a16:creationId xmlns:a16="http://schemas.microsoft.com/office/drawing/2014/main" id="{9277B1FE-22A9-1191-5040-823459462B38}"/>
+                <a16:creationId xmlns:a16="http://schemas.microsoft.com/office/drawing/2014/main" id="{CA480424-4DA8-E140-05EC-2213F3957420}"/>
               </a:ext>
             </a:extLst>
           </p:cNvPr>
@@ -5986,7 +6119,7 @@
           <a:p>
             <a:r>
               <a:rPr lang="en-AU" dirty="0"/>
-              <a:t>Demo Table</a:t>
+              <a:t>Example Logical Operators</a:t>
             </a:r>
           </a:p>
         </p:txBody>
@@ -5996,7 +6129,7 @@
           <p:cNvPr id="3" name="Content Placeholder 2">
             <a:extLst>
               <a:ext uri="{FF2B5EF4-FFF2-40B4-BE49-F238E27FC236}">
-                <a16:creationId xmlns:a16="http://schemas.microsoft.com/office/drawing/2014/main" id="{678944F3-8D4E-E361-4C3F-DE2A130CF60A}"/>
+                <a16:creationId xmlns:a16="http://schemas.microsoft.com/office/drawing/2014/main" id="{E3568E8A-F5B9-ADC2-56F8-9163DEF50641}"/>
               </a:ext>
             </a:extLst>
           </p:cNvPr>
@@ -6014,39 +6147,13 @@
           <a:p>
             <a:r>
               <a:rPr lang="en-AU" dirty="0"/>
-              <a:t>Using the </a:t>
-            </a:r>
-            <a:r>
-              <a:rPr lang="en-AU" dirty="0" err="1"/>
-              <a:t>PSList</a:t>
-            </a:r>
-            <a:r>
-              <a:rPr lang="en-AU" dirty="0"/>
-              <a:t> source type extract the fields seen in the screenshot below</a:t>
-            </a:r>
-          </a:p>
-          <a:p>
-            <a:pPr marL="0" indent="0">
-              <a:buNone/>
-            </a:pPr>
+              <a:t>Show any prefetch file which starts WU but not the string WUACLT.EXE… </a:t>
+            </a:r>
+          </a:p>
+          <a:p>
             <a:endParaRPr lang="en-AU" dirty="0"/>
           </a:p>
           <a:p>
-            <a:pPr marL="0" indent="0">
-              <a:buNone/>
-            </a:pPr>
-            <a:endParaRPr lang="en-AU" dirty="0"/>
-          </a:p>
-          <a:p>
-            <a:r>
-              <a:rPr lang="en-AU" dirty="0"/>
-              <a:t>After tabling source types get rid of duplications</a:t>
-            </a:r>
-          </a:p>
-          <a:p>
-            <a:pPr marL="0" indent="0">
-              <a:buNone/>
-            </a:pPr>
             <a:endParaRPr lang="en-AU" dirty="0"/>
           </a:p>
         </p:txBody>
@@ -6056,42 +6163,7 @@
           <p:cNvPr id="4" name="Picture 3">
             <a:extLst>
               <a:ext uri="{FF2B5EF4-FFF2-40B4-BE49-F238E27FC236}">
-                <a16:creationId xmlns:a16="http://schemas.microsoft.com/office/drawing/2014/main" id="{161E28F0-F02F-6AE8-E415-FB3E1B693828}"/>
-              </a:ext>
-            </a:extLst>
-          </p:cNvPr>
-          <p:cNvPicPr>
-            <a:picLocks noChangeAspect="1"/>
-          </p:cNvPicPr>
-          <p:nvPr/>
-        </p:nvPicPr>
-        <p:blipFill>
-          <a:blip r:embed="rId2"/>
-          <a:stretch>
-            <a:fillRect/>
-          </a:stretch>
-        </p:blipFill>
-        <p:spPr>
-          <a:xfrm>
-            <a:off x="3230245" y="2852541"/>
-            <a:ext cx="5731510" cy="599440"/>
-          </a:xfrm>
-          <a:prstGeom prst="rect">
-            <a:avLst/>
-          </a:prstGeom>
-          <a:ln w="25400">
-            <a:solidFill>
-              <a:schemeClr val="tx1"/>
-            </a:solidFill>
-          </a:ln>
-        </p:spPr>
-      </p:pic>
-      <p:pic>
-        <p:nvPicPr>
-          <p:cNvPr id="5" name="Picture 4">
-            <a:extLst>
-              <a:ext uri="{FF2B5EF4-FFF2-40B4-BE49-F238E27FC236}">
-                <a16:creationId xmlns:a16="http://schemas.microsoft.com/office/drawing/2014/main" id="{FE29D5EE-00AB-A5BC-11F0-66792B2387B1}"/>
+                <a16:creationId xmlns:a16="http://schemas.microsoft.com/office/drawing/2014/main" id="{E7216382-AEA9-CD6A-F502-CA06A160BB06}"/>
               </a:ext>
             </a:extLst>
           </p:cNvPr>
@@ -6108,8 +6180,8 @@
         </p:blipFill>
         <p:spPr>
           <a:xfrm>
-            <a:off x="3230245" y="4865642"/>
-            <a:ext cx="5731510" cy="697230"/>
+            <a:off x="838200" y="3493634"/>
+            <a:ext cx="9223238" cy="865490"/>
           </a:xfrm>
           <a:prstGeom prst="rect">
             <a:avLst/>
@@ -6124,7 +6196,7 @@
     </p:spTree>
     <p:extLst>
       <p:ext uri="{BB962C8B-B14F-4D97-AF65-F5344CB8AC3E}">
-        <p14:creationId xmlns:p14="http://schemas.microsoft.com/office/powerpoint/2010/main" val="2594184755"/>
+        <p14:creationId xmlns:p14="http://schemas.microsoft.com/office/powerpoint/2010/main" val="3272005510"/>
       </p:ext>
     </p:extLst>
   </p:cSld>
@@ -6447,4 +6519,319 @@
     </a:ext>
   </a:extLst>
 </a:theme>
+</file>
+
+<file path=ppt/theme/theme2.xml><?xml version="1.0" encoding="utf-8"?>
+<a:theme xmlns:a="http://schemas.openxmlformats.org/drawingml/2006/main" name="Office Theme">
+  <a:themeElements>
+    <a:clrScheme name="Office">
+      <a:dk1>
+        <a:sysClr val="windowText" lastClr="000000"/>
+      </a:dk1>
+      <a:lt1>
+        <a:sysClr val="window" lastClr="FFFFFF"/>
+      </a:lt1>
+      <a:dk2>
+        <a:srgbClr val="0E2841"/>
+      </a:dk2>
+      <a:lt2>
+        <a:srgbClr val="E8E8E8"/>
+      </a:lt2>
+      <a:accent1>
+        <a:srgbClr val="156082"/>
+      </a:accent1>
+      <a:accent2>
+        <a:srgbClr val="E97132"/>
+      </a:accent2>
+      <a:accent3>
+        <a:srgbClr val="196B24"/>
+      </a:accent3>
+      <a:accent4>
+        <a:srgbClr val="0F9ED5"/>
+      </a:accent4>
+      <a:accent5>
+        <a:srgbClr val="A02B93"/>
+      </a:accent5>
+      <a:accent6>
+        <a:srgbClr val="4EA72E"/>
+      </a:accent6>
+      <a:hlink>
+        <a:srgbClr val="467886"/>
+      </a:hlink>
+      <a:folHlink>
+        <a:srgbClr val="96607D"/>
+      </a:folHlink>
+    </a:clrScheme>
+    <a:fontScheme name="Office">
+      <a:majorFont>
+        <a:latin typeface="Aptos Display" panose="02110004020202020204"/>
+        <a:ea typeface=""/>
+        <a:cs typeface=""/>
+        <a:font script="Jpan" typeface="游ゴシック Light"/>
+        <a:font script="Hang" typeface="맑은 고딕"/>
+        <a:font script="Hans" typeface="等线 Light"/>
+        <a:font script="Hant" typeface="新細明體"/>
+        <a:font script="Arab" typeface="Times New Roman"/>
+        <a:font script="Hebr" typeface="Times New Roman"/>
+        <a:font script="Thai" typeface="Angsana New"/>
+        <a:font script="Ethi" typeface="Nyala"/>
+        <a:font script="Beng" typeface="Vrinda"/>
+        <a:font script="Gujr" typeface="Shruti"/>
+        <a:font script="Khmr" typeface="MoolBoran"/>
+        <a:font script="Knda" typeface="Tunga"/>
+        <a:font script="Guru" typeface="Raavi"/>
+        <a:font script="Cans" typeface="Euphemia"/>
+        <a:font script="Cher" typeface="Plantagenet Cherokee"/>
+        <a:font script="Yiii" typeface="Microsoft Yi Baiti"/>
+        <a:font script="Tibt" typeface="Microsoft Himalaya"/>
+        <a:font script="Thaa" typeface="MV Boli"/>
+        <a:font script="Deva" typeface="Mangal"/>
+        <a:font script="Telu" typeface="Gautami"/>
+        <a:font script="Taml" typeface="Latha"/>
+        <a:font script="Syrc" typeface="Estrangelo Edessa"/>
+        <a:font script="Orya" typeface="Kalinga"/>
+        <a:font script="Mlym" typeface="Kartika"/>
+        <a:font script="Laoo" typeface="DokChampa"/>
+        <a:font script="Sinh" typeface="Iskoola Pota"/>
+        <a:font script="Mong" typeface="Mongolian Baiti"/>
+        <a:font script="Viet" typeface="Times New Roman"/>
+        <a:font script="Uigh" typeface="Microsoft Uighur"/>
+        <a:font script="Geor" typeface="Sylfaen"/>
+        <a:font script="Armn" typeface="Arial"/>
+        <a:font script="Bugi" typeface="Leelawadee UI"/>
+        <a:font script="Bopo" typeface="Microsoft JhengHei"/>
+        <a:font script="Java" typeface="Javanese Text"/>
+        <a:font script="Lisu" typeface="Segoe UI"/>
+        <a:font script="Mymr" typeface="Myanmar Text"/>
+        <a:font script="Nkoo" typeface="Ebrima"/>
+        <a:font script="Olck" typeface="Nirmala UI"/>
+        <a:font script="Osma" typeface="Ebrima"/>
+        <a:font script="Phag" typeface="Phagspa"/>
+        <a:font script="Syrn" typeface="Estrangelo Edessa"/>
+        <a:font script="Syrj" typeface="Estrangelo Edessa"/>
+        <a:font script="Syre" typeface="Estrangelo Edessa"/>
+        <a:font script="Sora" typeface="Nirmala UI"/>
+        <a:font script="Tale" typeface="Microsoft Tai Le"/>
+        <a:font script="Talu" typeface="Microsoft New Tai Lue"/>
+        <a:font script="Tfng" typeface="Ebrima"/>
+      </a:majorFont>
+      <a:minorFont>
+        <a:latin typeface="Aptos" panose="02110004020202020204"/>
+        <a:ea typeface=""/>
+        <a:cs typeface=""/>
+        <a:font script="Jpan" typeface="游ゴシック"/>
+        <a:font script="Hang" typeface="맑은 고딕"/>
+        <a:font script="Hans" typeface="等线"/>
+        <a:font script="Hant" typeface="新細明體"/>
+        <a:font script="Arab" typeface="Arial"/>
+        <a:font script="Hebr" typeface="Arial"/>
+        <a:font script="Thai" typeface="Cordia New"/>
+        <a:font script="Ethi" typeface="Nyala"/>
+        <a:font script="Beng" typeface="Vrinda"/>
+        <a:font script="Gujr" typeface="Shruti"/>
+        <a:font script="Khmr" typeface="DaunPenh"/>
+        <a:font script="Knda" typeface="Tunga"/>
+        <a:font script="Guru" typeface="Raavi"/>
+        <a:font script="Cans" typeface="Euphemia"/>
+        <a:font script="Cher" typeface="Plantagenet Cherokee"/>
+        <a:font script="Yiii" typeface="Microsoft Yi Baiti"/>
+        <a:font script="Tibt" typeface="Microsoft Himalaya"/>
+        <a:font script="Thaa" typeface="MV Boli"/>
+        <a:font script="Deva" typeface="Mangal"/>
+        <a:font script="Telu" typeface="Gautami"/>
+        <a:font script="Taml" typeface="Latha"/>
+        <a:font script="Syrc" typeface="Estrangelo Edessa"/>
+        <a:font script="Orya" typeface="Kalinga"/>
+        <a:font script="Mlym" typeface="Kartika"/>
+        <a:font script="Laoo" typeface="DokChampa"/>
+        <a:font script="Sinh" typeface="Iskoola Pota"/>
+        <a:font script="Mong" typeface="Mongolian Baiti"/>
+        <a:font script="Viet" typeface="Arial"/>
+        <a:font script="Uigh" typeface="Microsoft Uighur"/>
+        <a:font script="Geor" typeface="Sylfaen"/>
+        <a:font script="Armn" typeface="Arial"/>
+        <a:font script="Bugi" typeface="Leelawadee UI"/>
+        <a:font script="Bopo" typeface="Microsoft JhengHei"/>
+        <a:font script="Java" typeface="Javanese Text"/>
+        <a:font script="Lisu" typeface="Segoe UI"/>
+        <a:font script="Mymr" typeface="Myanmar Text"/>
+        <a:font script="Nkoo" typeface="Ebrima"/>
+        <a:font script="Olck" typeface="Nirmala UI"/>
+        <a:font script="Osma" typeface="Ebrima"/>
+        <a:font script="Phag" typeface="Phagspa"/>
+        <a:font script="Syrn" typeface="Estrangelo Edessa"/>
+        <a:font script="Syrj" typeface="Estrangelo Edessa"/>
+        <a:font script="Syre" typeface="Estrangelo Edessa"/>
+        <a:font script="Sora" typeface="Nirmala UI"/>
+        <a:font script="Tale" typeface="Microsoft Tai Le"/>
+        <a:font script="Talu" typeface="Microsoft New Tai Lue"/>
+        <a:font script="Tfng" typeface="Ebrima"/>
+      </a:minorFont>
+    </a:fontScheme>
+    <a:fmtScheme name="Office">
+      <a:fillStyleLst>
+        <a:solidFill>
+          <a:schemeClr val="phClr"/>
+        </a:solidFill>
+        <a:gradFill rotWithShape="1">
+          <a:gsLst>
+            <a:gs pos="0">
+              <a:schemeClr val="phClr">
+                <a:lumMod val="110000"/>
+                <a:satMod val="105000"/>
+                <a:tint val="67000"/>
+              </a:schemeClr>
+            </a:gs>
+            <a:gs pos="50000">
+              <a:schemeClr val="phClr">
+                <a:lumMod val="105000"/>
+                <a:satMod val="103000"/>
+                <a:tint val="73000"/>
+              </a:schemeClr>
+            </a:gs>
+            <a:gs pos="100000">
+              <a:schemeClr val="phClr">
+                <a:lumMod val="105000"/>
+                <a:satMod val="109000"/>
+                <a:tint val="81000"/>
+              </a:schemeClr>
+            </a:gs>
+          </a:gsLst>
+          <a:lin ang="5400000" scaled="0"/>
+        </a:gradFill>
+        <a:gradFill rotWithShape="1">
+          <a:gsLst>
+            <a:gs pos="0">
+              <a:schemeClr val="phClr">
+                <a:satMod val="103000"/>
+                <a:lumMod val="102000"/>
+                <a:tint val="94000"/>
+              </a:schemeClr>
+            </a:gs>
+            <a:gs pos="50000">
+              <a:schemeClr val="phClr">
+                <a:satMod val="110000"/>
+                <a:lumMod val="100000"/>
+                <a:shade val="100000"/>
+              </a:schemeClr>
+            </a:gs>
+            <a:gs pos="100000">
+              <a:schemeClr val="phClr">
+                <a:lumMod val="99000"/>
+                <a:satMod val="120000"/>
+                <a:shade val="78000"/>
+              </a:schemeClr>
+            </a:gs>
+          </a:gsLst>
+          <a:lin ang="5400000" scaled="0"/>
+        </a:gradFill>
+      </a:fillStyleLst>
+      <a:lnStyleLst>
+        <a:ln w="12700" cap="flat" cmpd="sng" algn="ctr">
+          <a:solidFill>
+            <a:schemeClr val="phClr"/>
+          </a:solidFill>
+          <a:prstDash val="solid"/>
+          <a:miter lim="800000"/>
+        </a:ln>
+        <a:ln w="19050" cap="flat" cmpd="sng" algn="ctr">
+          <a:solidFill>
+            <a:schemeClr val="phClr"/>
+          </a:solidFill>
+          <a:prstDash val="solid"/>
+          <a:miter lim="800000"/>
+        </a:ln>
+        <a:ln w="25400" cap="flat" cmpd="sng" algn="ctr">
+          <a:solidFill>
+            <a:schemeClr val="phClr"/>
+          </a:solidFill>
+          <a:prstDash val="solid"/>
+          <a:miter lim="800000"/>
+        </a:ln>
+      </a:lnStyleLst>
+      <a:effectStyleLst>
+        <a:effectStyle>
+          <a:effectLst/>
+        </a:effectStyle>
+        <a:effectStyle>
+          <a:effectLst/>
+        </a:effectStyle>
+        <a:effectStyle>
+          <a:effectLst>
+            <a:outerShdw blurRad="57150" dist="19050" dir="5400000" algn="ctr" rotWithShape="0">
+              <a:srgbClr val="000000">
+                <a:alpha val="63000"/>
+              </a:srgbClr>
+            </a:outerShdw>
+          </a:effectLst>
+        </a:effectStyle>
+      </a:effectStyleLst>
+      <a:bgFillStyleLst>
+        <a:solidFill>
+          <a:schemeClr val="phClr"/>
+        </a:solidFill>
+        <a:solidFill>
+          <a:schemeClr val="phClr">
+            <a:tint val="95000"/>
+            <a:satMod val="170000"/>
+          </a:schemeClr>
+        </a:solidFill>
+        <a:gradFill rotWithShape="1">
+          <a:gsLst>
+            <a:gs pos="0">
+              <a:schemeClr val="phClr">
+                <a:tint val="93000"/>
+                <a:satMod val="150000"/>
+                <a:shade val="98000"/>
+                <a:lumMod val="102000"/>
+              </a:schemeClr>
+            </a:gs>
+            <a:gs pos="50000">
+              <a:schemeClr val="phClr">
+                <a:tint val="98000"/>
+                <a:satMod val="130000"/>
+                <a:shade val="90000"/>
+                <a:lumMod val="103000"/>
+              </a:schemeClr>
+            </a:gs>
+            <a:gs pos="100000">
+              <a:schemeClr val="phClr">
+                <a:shade val="63000"/>
+                <a:satMod val="120000"/>
+              </a:schemeClr>
+            </a:gs>
+          </a:gsLst>
+          <a:lin ang="5400000" scaled="0"/>
+        </a:gradFill>
+      </a:bgFillStyleLst>
+    </a:fmtScheme>
+  </a:themeElements>
+  <a:objectDefaults>
+    <a:lnDef>
+      <a:spPr/>
+      <a:bodyPr/>
+      <a:lstStyle/>
+      <a:style>
+        <a:lnRef idx="2">
+          <a:schemeClr val="accent1"/>
+        </a:lnRef>
+        <a:fillRef idx="0">
+          <a:schemeClr val="accent1"/>
+        </a:fillRef>
+        <a:effectRef idx="1">
+          <a:schemeClr val="accent1"/>
+        </a:effectRef>
+        <a:fontRef idx="minor">
+          <a:schemeClr val="tx1"/>
+        </a:fontRef>
+      </a:style>
+    </a:lnDef>
+  </a:objectDefaults>
+  <a:extraClrSchemeLst/>
+  <a:extLst>
+    <a:ext uri="{05A4C25C-085E-4340-85A3-A5531E510DB2}">
+      <thm15:themeFamily xmlns:thm15="http://schemas.microsoft.com/office/thememl/2012/main" name="Office Theme" id="{2E142A2C-CD16-42D6-873A-C26D2A0506FA}" vid="{1BDDFF52-6CD6-40A5-AB3C-68EB2F1E4D0A}"/>
+    </a:ext>
+  </a:extLst>
+</a:theme>
 </file>
--- a/host/Splunk/Training Cell - Conversion course - Splunk.pptx
+++ b/host/Splunk/Training Cell - Conversion course - Splunk.pptx
@@ -5,21 +5,20 @@
     <p:sldMasterId id="2147483648" r:id="rId1"/>
   </p:sldMasterIdLst>
   <p:notesMasterIdLst>
-    <p:notesMasterId r:id="rId14"/>
+    <p:notesMasterId r:id="rId13"/>
   </p:notesMasterIdLst>
   <p:sldIdLst>
     <p:sldId id="256" r:id="rId2"/>
     <p:sldId id="257" r:id="rId3"/>
     <p:sldId id="258" r:id="rId4"/>
-    <p:sldId id="269" r:id="rId5"/>
-    <p:sldId id="259" r:id="rId6"/>
-    <p:sldId id="270" r:id="rId7"/>
-    <p:sldId id="272" r:id="rId8"/>
-    <p:sldId id="260" r:id="rId9"/>
-    <p:sldId id="275" r:id="rId10"/>
-    <p:sldId id="277" r:id="rId11"/>
-    <p:sldId id="279" r:id="rId12"/>
-    <p:sldId id="261" r:id="rId13"/>
+    <p:sldId id="259" r:id="rId5"/>
+    <p:sldId id="270" r:id="rId6"/>
+    <p:sldId id="272" r:id="rId7"/>
+    <p:sldId id="260" r:id="rId8"/>
+    <p:sldId id="275" r:id="rId9"/>
+    <p:sldId id="277" r:id="rId10"/>
+    <p:sldId id="279" r:id="rId11"/>
+    <p:sldId id="261" r:id="rId12"/>
   </p:sldIdLst>
   <p:sldSz cx="12192000" cy="6858000"/>
   <p:notesSz cx="6858000" cy="9144000"/>
@@ -208,7 +207,7 @@
           <a:p>
             <a:fld id="{6D908D67-9536-4DD9-AEBE-83236953B92D}" type="datetimeFigureOut">
               <a:rPr lang="en-AU" smtClean="0"/>
-              <a:t>13/04/2026</a:t>
+              <a:t>15/04/2026</a:t>
             </a:fld>
             <a:endParaRPr lang="en-AU"/>
           </a:p>
@@ -522,17 +521,32 @@
           <a:p>
             <a:r>
               <a:rPr lang="en-US" dirty="0"/>
-              <a:t>Teacher notes:</a:t>
-            </a:r>
-          </a:p>
-          <a:p>
+              <a:t>Teacher Notes:</a:t>
+            </a:r>
+          </a:p>
+          <a:p>
+            <a:pPr marL="0" indent="0">
+              <a:buNone/>
+            </a:pPr>
             <a:endParaRPr lang="en-US" dirty="0"/>
           </a:p>
           <a:p>
             <a:r>
               <a:rPr lang="en-US" dirty="0"/>
-              <a:t>An index in Splunk is like a giant filing cabinet where all your data is stored, organized, and made searchable. It’s a way to categorize and organize your data so that Splunk can quickly find and retrieve it when you need it.</a:t>
-            </a:r>
+              <a:t>Splunk is widely used as a SIEM solution (Splunk Enterprise Security) to monitor security events, detect threats, and support incident response</a:t>
+            </a:r>
+          </a:p>
+          <a:p>
+            <a:endParaRPr lang="en-US" dirty="0"/>
+          </a:p>
+          <a:p>
+            <a:r>
+              <a:rPr lang="en-US" dirty="0"/>
+              <a:t>Splunk provides dashboards, alerts, and reports so teams can visualize activity and spot issues in real time or from a incident response angle </a:t>
+            </a:r>
+            <a:endParaRPr lang="en-AU" dirty="0"/>
+          </a:p>
+          <a:p>
             <a:endParaRPr lang="en-AU" dirty="0"/>
           </a:p>
         </p:txBody>
@@ -554,7 +568,7 @@
           <a:p>
             <a:fld id="{62F461C2-7142-42A3-A2AC-57CDC5960F55}" type="slidenum">
               <a:rPr lang="en-AU" smtClean="0"/>
-              <a:t>3</a:t>
+              <a:t>2</a:t>
             </a:fld>
             <a:endParaRPr lang="en-AU"/>
           </a:p>
@@ -563,7 +577,7 @@
     </p:spTree>
     <p:extLst>
       <p:ext uri="{BB962C8B-B14F-4D97-AF65-F5344CB8AC3E}">
-        <p14:creationId xmlns:p14="http://schemas.microsoft.com/office/powerpoint/2010/main" val="3161803539"/>
+        <p14:creationId xmlns:p14="http://schemas.microsoft.com/office/powerpoint/2010/main" val="549613953"/>
       </p:ext>
     </p:extLst>
   </p:cSld>
@@ -617,85 +631,20 @@
           <a:bodyPr/>
           <a:lstStyle/>
           <a:p>
-            <a:pPr marL="0" marR="0" lvl="0" indent="0" algn="l" defTabSz="914400" rtl="0" eaLnBrk="1" fontAlgn="auto" latinLnBrk="0" hangingPunct="1">
-              <a:lnSpc>
-                <a:spcPct val="100000"/>
-              </a:lnSpc>
-              <a:spcBef>
-                <a:spcPts val="0"/>
-              </a:spcBef>
-              <a:spcAft>
-                <a:spcPts val="0"/>
-              </a:spcAft>
-              <a:buClrTx/>
-              <a:buSzTx/>
-              <a:buFontTx/>
-              <a:buNone/>
-              <a:tabLst/>
-              <a:defRPr/>
-            </a:pPr>
-            <a:r>
-              <a:rPr lang="en-AU" dirty="0"/>
-              <a:t>Teacher Notes:</a:t>
-            </a:r>
-          </a:p>
-          <a:p>
-            <a:pPr marL="0" marR="0" lvl="0" indent="0" algn="l" defTabSz="914400" rtl="0" eaLnBrk="1" fontAlgn="auto" latinLnBrk="0" hangingPunct="1">
-              <a:lnSpc>
-                <a:spcPct val="100000"/>
-              </a:lnSpc>
-              <a:spcBef>
-                <a:spcPts val="0"/>
-              </a:spcBef>
-              <a:spcAft>
-                <a:spcPts val="0"/>
-              </a:spcAft>
-              <a:buClrTx/>
-              <a:buSzTx/>
-              <a:buFontTx/>
-              <a:buNone/>
-              <a:tabLst/>
-              <a:defRPr/>
-            </a:pPr>
-            <a:r>
-              <a:rPr lang="en-AU" dirty="0"/>
-              <a:t>- Explore spunk home page</a:t>
-            </a:r>
-          </a:p>
-          <a:p>
-            <a:pPr marL="0" marR="0" lvl="0" indent="0" algn="l" defTabSz="914400" rtl="0" eaLnBrk="1" fontAlgn="auto" latinLnBrk="0" hangingPunct="1">
-              <a:lnSpc>
-                <a:spcPct val="100000"/>
-              </a:lnSpc>
-              <a:spcBef>
-                <a:spcPts val="0"/>
-              </a:spcBef>
-              <a:spcAft>
-                <a:spcPts val="0"/>
-              </a:spcAft>
-              <a:buClrTx/>
-              <a:buSzTx/>
-              <a:buFontTx/>
-              <a:buNone/>
-              <a:tabLst/>
-              <a:defRPr/>
-            </a:pPr>
-            <a:r>
-              <a:rPr lang="en-AU" dirty="0"/>
-              <a:t>(index=* for demo only, use a specified index in production environment)</a:t>
-            </a:r>
-          </a:p>
-          <a:p>
-            <a:r>
-              <a:rPr lang="en-AU" dirty="0"/>
-              <a:t> </a:t>
-            </a:r>
-          </a:p>
-          <a:p>
-            <a:r>
-              <a:rPr lang="en-AU" dirty="0"/>
-              <a:t>Source types are like filters within the index</a:t>
-            </a:r>
+            <a:r>
+              <a:rPr lang="en-US" dirty="0"/>
+              <a:t>Teacher notes:</a:t>
+            </a:r>
+          </a:p>
+          <a:p>
+            <a:endParaRPr lang="en-US" dirty="0"/>
+          </a:p>
+          <a:p>
+            <a:r>
+              <a:rPr lang="en-US" dirty="0"/>
+              <a:t>An index in Splunk is like a giant filing cabinet where all your data is stored, organized, and made searchable. It’s a way to categorize and organize your data so that Splunk can quickly find and retrieve it when you need it.</a:t>
+            </a:r>
+            <a:endParaRPr lang="en-AU" dirty="0"/>
           </a:p>
         </p:txBody>
       </p:sp>
@@ -716,7 +665,7 @@
           <a:p>
             <a:fld id="{62F461C2-7142-42A3-A2AC-57CDC5960F55}" type="slidenum">
               <a:rPr lang="en-AU" smtClean="0"/>
-              <a:t>4</a:t>
+              <a:t>3</a:t>
             </a:fld>
             <a:endParaRPr lang="en-AU"/>
           </a:p>
@@ -725,7 +674,7 @@
     </p:spTree>
     <p:extLst>
       <p:ext uri="{BB962C8B-B14F-4D97-AF65-F5344CB8AC3E}">
-        <p14:creationId xmlns:p14="http://schemas.microsoft.com/office/powerpoint/2010/main" val="479526323"/>
+        <p14:creationId xmlns:p14="http://schemas.microsoft.com/office/powerpoint/2010/main" val="3161803539"/>
       </p:ext>
     </p:extLst>
   </p:cSld>
@@ -817,7 +766,7 @@
           <a:p>
             <a:fld id="{62F461C2-7142-42A3-A2AC-57CDC5960F55}" type="slidenum">
               <a:rPr lang="en-AU" smtClean="0"/>
-              <a:t>5</a:t>
+              <a:t>4</a:t>
             </a:fld>
             <a:endParaRPr lang="en-AU"/>
           </a:p>
@@ -998,7 +947,7 @@
           <a:p>
             <a:fld id="{62F461C2-7142-42A3-A2AC-57CDC5960F55}" type="slidenum">
               <a:rPr lang="en-AU" smtClean="0"/>
-              <a:t>6</a:t>
+              <a:t>5</a:t>
             </a:fld>
             <a:endParaRPr lang="en-AU"/>
           </a:p>
@@ -1095,7 +1044,7 @@
           <a:p>
             <a:fld id="{62F461C2-7142-42A3-A2AC-57CDC5960F55}" type="slidenum">
               <a:rPr lang="en-AU" smtClean="0"/>
-              <a:t>7</a:t>
+              <a:t>6</a:t>
             </a:fld>
             <a:endParaRPr lang="en-AU"/>
           </a:p>
@@ -1192,7 +1141,7 @@
           <a:p>
             <a:fld id="{62F461C2-7142-42A3-A2AC-57CDC5960F55}" type="slidenum">
               <a:rPr lang="en-AU" smtClean="0"/>
-              <a:t>9</a:t>
+              <a:t>8</a:t>
             </a:fld>
             <a:endParaRPr lang="en-AU"/>
           </a:p>
@@ -1266,8 +1215,13 @@
           <a:p>
             <a:r>
               <a:rPr lang="en-US" dirty="0"/>
-              <a:t>Regex is very useful especially to apply fine filtering or refine searches.</a:t>
-            </a:r>
+              <a:t>Regex is very useful especially to apply fine filtering or refine searches and can also be used directly in the command line of </a:t>
+            </a:r>
+            <a:r>
+              <a:rPr lang="en-US" dirty="0" err="1"/>
+              <a:t>splunk</a:t>
+            </a:r>
+            <a:endParaRPr lang="en-US" dirty="0"/>
           </a:p>
           <a:p>
             <a:endParaRPr lang="en-US" dirty="0"/>
@@ -1320,7 +1274,7 @@
           <a:p>
             <a:fld id="{62F461C2-7142-42A3-A2AC-57CDC5960F55}" type="slidenum">
               <a:rPr lang="en-AU" smtClean="0"/>
-              <a:t>10</a:t>
+              <a:t>9</a:t>
             </a:fld>
             <a:endParaRPr lang="en-AU"/>
           </a:p>
@@ -1417,7 +1371,7 @@
           <a:p>
             <a:fld id="{62F461C2-7142-42A3-A2AC-57CDC5960F55}" type="slidenum">
               <a:rPr lang="en-AU" smtClean="0"/>
-              <a:t>11</a:t>
+              <a:t>10</a:t>
             </a:fld>
             <a:endParaRPr lang="en-AU"/>
           </a:p>
@@ -1427,6 +1381,121 @@
     <p:extLst>
       <p:ext uri="{BB962C8B-B14F-4D97-AF65-F5344CB8AC3E}">
         <p14:creationId xmlns:p14="http://schemas.microsoft.com/office/powerpoint/2010/main" val="1891774433"/>
+      </p:ext>
+    </p:extLst>
+  </p:cSld>
+  <p:clrMapOvr>
+    <a:masterClrMapping/>
+  </p:clrMapOvr>
+</p:notes>
+</file>
+
+<file path=ppt/notesSlides/notesSlide9.xml><?xml version="1.0" encoding="utf-8"?>
+<p:notes xmlns:a="http://schemas.openxmlformats.org/drawingml/2006/main" xmlns:r="http://schemas.openxmlformats.org/officeDocument/2006/relationships" xmlns:p="http://schemas.openxmlformats.org/presentationml/2006/main">
+  <p:cSld>
+    <p:spTree>
+      <p:nvGrpSpPr>
+        <p:cNvPr id="1" name=""/>
+        <p:cNvGrpSpPr/>
+        <p:nvPr/>
+      </p:nvGrpSpPr>
+      <p:grpSpPr>
+        <a:xfrm>
+          <a:off x="0" y="0"/>
+          <a:ext cx="0" cy="0"/>
+          <a:chOff x="0" y="0"/>
+          <a:chExt cx="0" cy="0"/>
+        </a:xfrm>
+      </p:grpSpPr>
+      <p:sp>
+        <p:nvSpPr>
+          <p:cNvPr id="2" name="Slide Image Placeholder 1"/>
+          <p:cNvSpPr>
+            <a:spLocks noGrp="1" noRot="1" noChangeAspect="1"/>
+          </p:cNvSpPr>
+          <p:nvPr>
+            <p:ph type="sldImg"/>
+          </p:nvPr>
+        </p:nvSpPr>
+        <p:spPr/>
+      </p:sp>
+      <p:sp>
+        <p:nvSpPr>
+          <p:cNvPr id="3" name="Notes Placeholder 2"/>
+          <p:cNvSpPr>
+            <a:spLocks noGrp="1"/>
+          </p:cNvSpPr>
+          <p:nvPr>
+            <p:ph type="body" idx="1"/>
+          </p:nvPr>
+        </p:nvSpPr>
+        <p:spPr/>
+        <p:txBody>
+          <a:bodyPr/>
+          <a:lstStyle/>
+          <a:p>
+            <a:r>
+              <a:rPr lang="en-US" dirty="0"/>
+              <a:t>Teacher Note: </a:t>
+            </a:r>
+          </a:p>
+          <a:p>
+            <a:endParaRPr lang="en-US" dirty="0"/>
+          </a:p>
+          <a:p>
+            <a:r>
+              <a:rPr lang="en-US" dirty="0"/>
+              <a:t>Baseline dashboards are primarily used to detect what is and isn’t normal.</a:t>
+            </a:r>
+          </a:p>
+          <a:p>
+            <a:endParaRPr lang="en-US" dirty="0"/>
+          </a:p>
+          <a:p>
+            <a:r>
+              <a:rPr lang="en-US" dirty="0"/>
+              <a:t>Drilldown dashboards on important data for further analysis and are very useful in finding artifacts after initial malicious behavior has been detected</a:t>
+            </a:r>
+          </a:p>
+          <a:p>
+            <a:endParaRPr lang="en-US" dirty="0"/>
+          </a:p>
+          <a:p>
+            <a:r>
+              <a:rPr lang="en-US" dirty="0"/>
+              <a:t>Alerts style dashboard are very useful for live or ongoing monitoring.</a:t>
+            </a:r>
+            <a:endParaRPr lang="en-AU" dirty="0"/>
+          </a:p>
+        </p:txBody>
+      </p:sp>
+      <p:sp>
+        <p:nvSpPr>
+          <p:cNvPr id="4" name="Slide Number Placeholder 3"/>
+          <p:cNvSpPr>
+            <a:spLocks noGrp="1"/>
+          </p:cNvSpPr>
+          <p:nvPr>
+            <p:ph type="sldNum" sz="quarter" idx="5"/>
+          </p:nvPr>
+        </p:nvSpPr>
+        <p:spPr/>
+        <p:txBody>
+          <a:bodyPr/>
+          <a:lstStyle/>
+          <a:p>
+            <a:fld id="{62F461C2-7142-42A3-A2AC-57CDC5960F55}" type="slidenum">
+              <a:rPr lang="en-AU" smtClean="0"/>
+              <a:t>11</a:t>
+            </a:fld>
+            <a:endParaRPr lang="en-AU"/>
+          </a:p>
+        </p:txBody>
+      </p:sp>
+    </p:spTree>
+    <p:extLst>
+      <p:ext uri="{BB962C8B-B14F-4D97-AF65-F5344CB8AC3E}">
+        <p14:creationId xmlns:p14="http://schemas.microsoft.com/office/powerpoint/2010/main" val="2402353839"/>
       </p:ext>
     </p:extLst>
   </p:cSld>
@@ -1585,7 +1654,7 @@
           <a:p>
             <a:fld id="{266447FA-567A-498F-ABE1-423C63A16A7D}" type="datetimeFigureOut">
               <a:rPr lang="en-AU" smtClean="0"/>
-              <a:t>13/04/2026</a:t>
+              <a:t>15/04/2026</a:t>
             </a:fld>
             <a:endParaRPr lang="en-AU"/>
           </a:p>
@@ -1785,7 +1854,7 @@
           <a:p>
             <a:fld id="{266447FA-567A-498F-ABE1-423C63A16A7D}" type="datetimeFigureOut">
               <a:rPr lang="en-AU" smtClean="0"/>
-              <a:t>13/04/2026</a:t>
+              <a:t>15/04/2026</a:t>
             </a:fld>
             <a:endParaRPr lang="en-AU"/>
           </a:p>
@@ -1995,7 +2064,7 @@
           <a:p>
             <a:fld id="{266447FA-567A-498F-ABE1-423C63A16A7D}" type="datetimeFigureOut">
               <a:rPr lang="en-AU" smtClean="0"/>
-              <a:t>13/04/2026</a:t>
+              <a:t>15/04/2026</a:t>
             </a:fld>
             <a:endParaRPr lang="en-AU"/>
           </a:p>
@@ -2195,7 +2264,7 @@
           <a:p>
             <a:fld id="{266447FA-567A-498F-ABE1-423C63A16A7D}" type="datetimeFigureOut">
               <a:rPr lang="en-AU" smtClean="0"/>
-              <a:t>13/04/2026</a:t>
+              <a:t>15/04/2026</a:t>
             </a:fld>
             <a:endParaRPr lang="en-AU"/>
           </a:p>
@@ -2471,7 +2540,7 @@
           <a:p>
             <a:fld id="{266447FA-567A-498F-ABE1-423C63A16A7D}" type="datetimeFigureOut">
               <a:rPr lang="en-AU" smtClean="0"/>
-              <a:t>13/04/2026</a:t>
+              <a:t>15/04/2026</a:t>
             </a:fld>
             <a:endParaRPr lang="en-AU"/>
           </a:p>
@@ -2739,7 +2808,7 @@
           <a:p>
             <a:fld id="{266447FA-567A-498F-ABE1-423C63A16A7D}" type="datetimeFigureOut">
               <a:rPr lang="en-AU" smtClean="0"/>
-              <a:t>13/04/2026</a:t>
+              <a:t>15/04/2026</a:t>
             </a:fld>
             <a:endParaRPr lang="en-AU"/>
           </a:p>
@@ -3154,7 +3223,7 @@
           <a:p>
             <a:fld id="{266447FA-567A-498F-ABE1-423C63A16A7D}" type="datetimeFigureOut">
               <a:rPr lang="en-AU" smtClean="0"/>
-              <a:t>13/04/2026</a:t>
+              <a:t>15/04/2026</a:t>
             </a:fld>
             <a:endParaRPr lang="en-AU"/>
           </a:p>
@@ -3296,7 +3365,7 @@
           <a:p>
             <a:fld id="{266447FA-567A-498F-ABE1-423C63A16A7D}" type="datetimeFigureOut">
               <a:rPr lang="en-AU" smtClean="0"/>
-              <a:t>13/04/2026</a:t>
+              <a:t>15/04/2026</a:t>
             </a:fld>
             <a:endParaRPr lang="en-AU"/>
           </a:p>
@@ -3409,7 +3478,7 @@
           <a:p>
             <a:fld id="{266447FA-567A-498F-ABE1-423C63A16A7D}" type="datetimeFigureOut">
               <a:rPr lang="en-AU" smtClean="0"/>
-              <a:t>13/04/2026</a:t>
+              <a:t>15/04/2026</a:t>
             </a:fld>
             <a:endParaRPr lang="en-AU"/>
           </a:p>
@@ -3722,7 +3791,7 @@
           <a:p>
             <a:fld id="{266447FA-567A-498F-ABE1-423C63A16A7D}" type="datetimeFigureOut">
               <a:rPr lang="en-AU" smtClean="0"/>
-              <a:t>13/04/2026</a:t>
+              <a:t>15/04/2026</a:t>
             </a:fld>
             <a:endParaRPr lang="en-AU"/>
           </a:p>
@@ -4011,7 +4080,7 @@
           <a:p>
             <a:fld id="{266447FA-567A-498F-ABE1-423C63A16A7D}" type="datetimeFigureOut">
               <a:rPr lang="en-AU" smtClean="0"/>
-              <a:t>13/04/2026</a:t>
+              <a:t>15/04/2026</a:t>
             </a:fld>
             <a:endParaRPr lang="en-AU"/>
           </a:p>
@@ -4254,7 +4323,7 @@
           <a:p>
             <a:fld id="{266447FA-567A-498F-ABE1-423C63A16A7D}" type="datetimeFigureOut">
               <a:rPr lang="en-AU" smtClean="0"/>
-              <a:t>13/04/2026</a:t>
+              <a:t>15/04/2026</a:t>
             </a:fld>
             <a:endParaRPr lang="en-AU"/>
           </a:p>
@@ -4760,7 +4829,7 @@
           <p:cNvPr id="2" name="Title 1">
             <a:extLst>
               <a:ext uri="{FF2B5EF4-FFF2-40B4-BE49-F238E27FC236}">
-                <a16:creationId xmlns:a16="http://schemas.microsoft.com/office/drawing/2014/main" id="{311C424B-4F60-03EA-57A9-C4318A90D1A8}"/>
+                <a16:creationId xmlns:a16="http://schemas.microsoft.com/office/drawing/2014/main" id="{B881D264-8733-0EF3-C8CC-B7A375921B77}"/>
               </a:ext>
             </a:extLst>
           </p:cNvPr>
@@ -4778,13 +4847,8 @@
           <a:p>
             <a:r>
               <a:rPr lang="en-AU" dirty="0"/>
-              <a:t>Regex in </a:t>
-            </a:r>
-            <a:r>
-              <a:rPr lang="en-AU" dirty="0" err="1"/>
-              <a:t>splunk</a:t>
-            </a:r>
-            <a:endParaRPr lang="en-AU" dirty="0"/>
+              <a:t>Baselining</a:t>
+            </a:r>
           </a:p>
         </p:txBody>
       </p:sp>
@@ -4793,7 +4857,7 @@
           <p:cNvPr id="3" name="Content Placeholder 2">
             <a:extLst>
               <a:ext uri="{FF2B5EF4-FFF2-40B4-BE49-F238E27FC236}">
-                <a16:creationId xmlns:a16="http://schemas.microsoft.com/office/drawing/2014/main" id="{0BE113D1-625D-E148-8A2F-8E8922728008}"/>
+                <a16:creationId xmlns:a16="http://schemas.microsoft.com/office/drawing/2014/main" id="{B92AC551-11EA-69E8-93ED-42FC9CDCC07B}"/>
               </a:ext>
             </a:extLst>
           </p:cNvPr>
@@ -4811,7 +4875,7 @@
           <a:p>
             <a:r>
               <a:rPr lang="en-AU" dirty="0"/>
-              <a:t>If your events has too many strings where it is not able to properly extract values, you can regex events to get better filters. </a:t>
+              <a:t>When you setup in a network the first step you conduct is usually a baseline to determine what is and isn’t normal.</a:t>
             </a:r>
           </a:p>
           <a:p>
@@ -4821,20 +4885,17 @@
             <a:endParaRPr lang="en-AU" dirty="0"/>
           </a:p>
           <a:p>
-            <a:endParaRPr lang="en-AU" dirty="0"/>
-          </a:p>
-          <a:p>
-            <a:pPr marL="0" indent="0">
-              <a:buNone/>
-            </a:pPr>
-            <a:endParaRPr lang="en-AU" dirty="0"/>
+            <a:r>
+              <a:rPr lang="en-AU" dirty="0"/>
+              <a:t>A common was you can do this by making CSV of current data and for future searches you compare the output to the original baseline CSV, any new unique events will flag it. </a:t>
+            </a:r>
           </a:p>
         </p:txBody>
       </p:sp>
     </p:spTree>
     <p:extLst>
       <p:ext uri="{BB962C8B-B14F-4D97-AF65-F5344CB8AC3E}">
-        <p14:creationId xmlns:p14="http://schemas.microsoft.com/office/powerpoint/2010/main" val="2712621605"/>
+        <p14:creationId xmlns:p14="http://schemas.microsoft.com/office/powerpoint/2010/main" val="1719264778"/>
       </p:ext>
     </p:extLst>
   </p:cSld>
@@ -4866,104 +4927,6 @@
           <p:cNvPr id="2" name="Title 1">
             <a:extLst>
               <a:ext uri="{FF2B5EF4-FFF2-40B4-BE49-F238E27FC236}">
-                <a16:creationId xmlns:a16="http://schemas.microsoft.com/office/drawing/2014/main" id="{B881D264-8733-0EF3-C8CC-B7A375921B77}"/>
-              </a:ext>
-            </a:extLst>
-          </p:cNvPr>
-          <p:cNvSpPr>
-            <a:spLocks noGrp="1"/>
-          </p:cNvSpPr>
-          <p:nvPr>
-            <p:ph type="title"/>
-          </p:nvPr>
-        </p:nvSpPr>
-        <p:spPr/>
-        <p:txBody>
-          <a:bodyPr/>
-          <a:lstStyle/>
-          <a:p>
-            <a:r>
-              <a:rPr lang="en-AU" dirty="0"/>
-              <a:t>Baselining</a:t>
-            </a:r>
-          </a:p>
-        </p:txBody>
-      </p:sp>
-      <p:sp>
-        <p:nvSpPr>
-          <p:cNvPr id="3" name="Content Placeholder 2">
-            <a:extLst>
-              <a:ext uri="{FF2B5EF4-FFF2-40B4-BE49-F238E27FC236}">
-                <a16:creationId xmlns:a16="http://schemas.microsoft.com/office/drawing/2014/main" id="{B92AC551-11EA-69E8-93ED-42FC9CDCC07B}"/>
-              </a:ext>
-            </a:extLst>
-          </p:cNvPr>
-          <p:cNvSpPr>
-            <a:spLocks noGrp="1"/>
-          </p:cNvSpPr>
-          <p:nvPr>
-            <p:ph idx="1"/>
-          </p:nvPr>
-        </p:nvSpPr>
-        <p:spPr/>
-        <p:txBody>
-          <a:bodyPr/>
-          <a:lstStyle/>
-          <a:p>
-            <a:r>
-              <a:rPr lang="en-AU" dirty="0"/>
-              <a:t>When you setup in a network the first step you conduct is usually a baseline. </a:t>
-            </a:r>
-          </a:p>
-          <a:p>
-            <a:pPr marL="0" indent="0">
-              <a:buNone/>
-            </a:pPr>
-            <a:endParaRPr lang="en-AU" dirty="0"/>
-          </a:p>
-          <a:p>
-            <a:r>
-              <a:rPr lang="en-AU" dirty="0"/>
-              <a:t>You can do this by making CSV and for future searches you compare the output to the CSV any new unique events will flag it. </a:t>
-            </a:r>
-          </a:p>
-        </p:txBody>
-      </p:sp>
-    </p:spTree>
-    <p:extLst>
-      <p:ext uri="{BB962C8B-B14F-4D97-AF65-F5344CB8AC3E}">
-        <p14:creationId xmlns:p14="http://schemas.microsoft.com/office/powerpoint/2010/main" val="1719264778"/>
-      </p:ext>
-    </p:extLst>
-  </p:cSld>
-  <p:clrMapOvr>
-    <a:masterClrMapping/>
-  </p:clrMapOvr>
-</p:sld>
-</file>
-
-<file path=ppt/slides/slide12.xml><?xml version="1.0" encoding="utf-8"?>
-<p:sld xmlns:a="http://schemas.openxmlformats.org/drawingml/2006/main" xmlns:r="http://schemas.openxmlformats.org/officeDocument/2006/relationships" xmlns:p="http://schemas.openxmlformats.org/presentationml/2006/main">
-  <p:cSld>
-    <p:spTree>
-      <p:nvGrpSpPr>
-        <p:cNvPr id="1" name=""/>
-        <p:cNvGrpSpPr/>
-        <p:nvPr/>
-      </p:nvGrpSpPr>
-      <p:grpSpPr>
-        <a:xfrm>
-          <a:off x="0" y="0"/>
-          <a:ext cx="0" cy="0"/>
-          <a:chOff x="0" y="0"/>
-          <a:chExt cx="0" cy="0"/>
-        </a:xfrm>
-      </p:grpSpPr>
-      <p:sp>
-        <p:nvSpPr>
-          <p:cNvPr id="2" name="Title 1">
-            <a:extLst>
-              <a:ext uri="{FF2B5EF4-FFF2-40B4-BE49-F238E27FC236}">
                 <a16:creationId xmlns:a16="http://schemas.microsoft.com/office/drawing/2014/main" id="{8E7A6994-1E0E-48A5-9938-3C665347D46B}"/>
               </a:ext>
             </a:extLst>
@@ -5019,13 +4982,43 @@
           <a:p>
             <a:r>
               <a:rPr lang="en-US" dirty="0"/>
-              <a:t>Dashboards can also be used to help drill down on important data for further analysis and are very useful in creating baselines to help determine what is and isn’t normal on a network.</a:t>
-            </a:r>
-          </a:p>
-          <a:p>
-            <a:pPr marL="0" indent="0">
-              <a:buNone/>
+              <a:t>Three main uses for dashboards in </a:t>
+            </a:r>
+            <a:r>
+              <a:rPr lang="en-US" dirty="0" err="1"/>
+              <a:t>splunk</a:t>
+            </a:r>
+            <a:endParaRPr lang="en-US" dirty="0"/>
+          </a:p>
+          <a:p>
+            <a:pPr>
+              <a:buFontTx/>
+              <a:buChar char="-"/>
             </a:pPr>
+            <a:r>
+              <a:rPr lang="en-US" dirty="0"/>
+              <a:t>Baseline </a:t>
+            </a:r>
+          </a:p>
+          <a:p>
+            <a:pPr>
+              <a:buFontTx/>
+              <a:buChar char="-"/>
+            </a:pPr>
+            <a:r>
+              <a:rPr lang="en-US" dirty="0"/>
+              <a:t>Drilldown </a:t>
+            </a:r>
+          </a:p>
+          <a:p>
+            <a:pPr>
+              <a:buFontTx/>
+              <a:buChar char="-"/>
+            </a:pPr>
+            <a:r>
+              <a:rPr lang="en-US" dirty="0"/>
+              <a:t>Alerts</a:t>
+            </a:r>
             <a:endParaRPr lang="en-AU" dirty="0"/>
           </a:p>
         </p:txBody>
@@ -5118,25 +5111,6 @@
             </a:r>
           </a:p>
           <a:p>
-            <a:pPr marL="0" indent="0">
-              <a:buNone/>
-            </a:pPr>
-            <a:endParaRPr lang="en-US" dirty="0"/>
-          </a:p>
-          <a:p>
-            <a:r>
-              <a:rPr lang="en-US" dirty="0"/>
-              <a:t>It is widely used as a SIEM solution (Splunk Enterprise Security) to monitor security events, detect threats, and support incident response</a:t>
-            </a:r>
-          </a:p>
-          <a:p>
-            <a:endParaRPr lang="en-US" dirty="0"/>
-          </a:p>
-          <a:p>
-            <a:r>
-              <a:rPr lang="en-US" dirty="0"/>
-              <a:t>Splunk provides dashboards, alerts, and reports so teams can visualize activity and spot issues in real time</a:t>
-            </a:r>
             <a:endParaRPr lang="en-AU" dirty="0"/>
           </a:p>
         </p:txBody>
@@ -5286,191 +5260,6 @@
 </file>
 
 <file path=ppt/slides/slide4.xml><?xml version="1.0" encoding="utf-8"?>
-<p:sld xmlns:a="http://schemas.openxmlformats.org/drawingml/2006/main" xmlns:r="http://schemas.openxmlformats.org/officeDocument/2006/relationships" xmlns:p="http://schemas.openxmlformats.org/presentationml/2006/main">
-  <p:cSld>
-    <p:spTree>
-      <p:nvGrpSpPr>
-        <p:cNvPr id="1" name=""/>
-        <p:cNvGrpSpPr/>
-        <p:nvPr/>
-      </p:nvGrpSpPr>
-      <p:grpSpPr>
-        <a:xfrm>
-          <a:off x="0" y="0"/>
-          <a:ext cx="0" cy="0"/>
-          <a:chOff x="0" y="0"/>
-          <a:chExt cx="0" cy="0"/>
-        </a:xfrm>
-      </p:grpSpPr>
-      <p:sp>
-        <p:nvSpPr>
-          <p:cNvPr id="2" name="Title 1">
-            <a:extLst>
-              <a:ext uri="{FF2B5EF4-FFF2-40B4-BE49-F238E27FC236}">
-                <a16:creationId xmlns:a16="http://schemas.microsoft.com/office/drawing/2014/main" id="{411D65AC-0BD4-3378-49AE-B3769605E014}"/>
-              </a:ext>
-            </a:extLst>
-          </p:cNvPr>
-          <p:cNvSpPr>
-            <a:spLocks noGrp="1"/>
-          </p:cNvSpPr>
-          <p:nvPr>
-            <p:ph type="title"/>
-          </p:nvPr>
-        </p:nvSpPr>
-        <p:spPr/>
-        <p:txBody>
-          <a:bodyPr/>
-          <a:lstStyle/>
-          <a:p>
-            <a:r>
-              <a:rPr lang="en-AU" dirty="0"/>
-              <a:t>Demo - </a:t>
-            </a:r>
-            <a:r>
-              <a:rPr lang="en-AU" dirty="0" err="1"/>
-              <a:t>splunk</a:t>
-            </a:r>
-            <a:r>
-              <a:rPr lang="en-AU" dirty="0"/>
-              <a:t> homepage and viewing source types</a:t>
-            </a:r>
-          </a:p>
-        </p:txBody>
-      </p:sp>
-      <p:sp>
-        <p:nvSpPr>
-          <p:cNvPr id="3" name="Content Placeholder 2">
-            <a:extLst>
-              <a:ext uri="{FF2B5EF4-FFF2-40B4-BE49-F238E27FC236}">
-                <a16:creationId xmlns:a16="http://schemas.microsoft.com/office/drawing/2014/main" id="{E3410602-4487-4787-8BFE-3ABFD0A10F66}"/>
-              </a:ext>
-            </a:extLst>
-          </p:cNvPr>
-          <p:cNvSpPr>
-            <a:spLocks noGrp="1"/>
-          </p:cNvSpPr>
-          <p:nvPr>
-            <p:ph idx="1"/>
-          </p:nvPr>
-        </p:nvSpPr>
-        <p:spPr/>
-        <p:txBody>
-          <a:bodyPr/>
-          <a:lstStyle/>
-          <a:p>
-            <a:pPr marL="0" indent="0">
-              <a:buNone/>
-            </a:pPr>
-            <a:r>
-              <a:rPr lang="en-AU" b="1" dirty="0"/>
-              <a:t>Demo</a:t>
-            </a:r>
-          </a:p>
-          <a:p>
-            <a:r>
-              <a:rPr lang="en-AU" dirty="0"/>
-              <a:t>Navigate to </a:t>
-            </a:r>
-            <a:r>
-              <a:rPr lang="en-AU" dirty="0" err="1"/>
-              <a:t>splunk</a:t>
-            </a:r>
-            <a:r>
-              <a:rPr lang="en-AU" dirty="0"/>
-              <a:t> homepage via </a:t>
-            </a:r>
-            <a:r>
-              <a:rPr lang="en-AU" b="1" dirty="0"/>
-              <a:t>Search&amp; Reporting</a:t>
-            </a:r>
-          </a:p>
-          <a:p>
-            <a:endParaRPr lang="en-AU" b="1" dirty="0"/>
-          </a:p>
-          <a:p>
-            <a:endParaRPr lang="en-AU" dirty="0"/>
-          </a:p>
-          <a:p>
-            <a:pPr marL="0" indent="0">
-              <a:buNone/>
-            </a:pPr>
-            <a:r>
-              <a:rPr lang="en-AU" b="1" dirty="0"/>
-              <a:t>Viewing Source Types</a:t>
-            </a:r>
-          </a:p>
-          <a:p>
-            <a:r>
-              <a:rPr lang="en-AU" dirty="0"/>
-              <a:t>To determine source types loaded into </a:t>
-            </a:r>
-            <a:r>
-              <a:rPr lang="en-AU" dirty="0" err="1"/>
-              <a:t>splunk</a:t>
-            </a:r>
-            <a:r>
-              <a:rPr lang="en-AU" dirty="0"/>
-              <a:t> search:</a:t>
-            </a:r>
-          </a:p>
-          <a:p>
-            <a:pPr marL="0" indent="0">
-              <a:buNone/>
-            </a:pPr>
-            <a:endParaRPr lang="en-AU" dirty="0"/>
-          </a:p>
-        </p:txBody>
-      </p:sp>
-      <p:pic>
-        <p:nvPicPr>
-          <p:cNvPr id="4" name="Picture 3">
-            <a:extLst>
-              <a:ext uri="{FF2B5EF4-FFF2-40B4-BE49-F238E27FC236}">
-                <a16:creationId xmlns:a16="http://schemas.microsoft.com/office/drawing/2014/main" id="{10A20294-A1CC-CB45-1124-08B95F8DFD24}"/>
-              </a:ext>
-            </a:extLst>
-          </p:cNvPr>
-          <p:cNvPicPr>
-            <a:picLocks noChangeAspect="1"/>
-          </p:cNvPicPr>
-          <p:nvPr/>
-        </p:nvPicPr>
-        <p:blipFill>
-          <a:blip r:embed="rId3"/>
-          <a:stretch>
-            <a:fillRect/>
-          </a:stretch>
-        </p:blipFill>
-        <p:spPr>
-          <a:xfrm>
-            <a:off x="1266974" y="4876799"/>
-            <a:ext cx="5731510" cy="988060"/>
-          </a:xfrm>
-          <a:prstGeom prst="rect">
-            <a:avLst/>
-          </a:prstGeom>
-          <a:ln w="25400">
-            <a:solidFill>
-              <a:schemeClr val="tx1"/>
-            </a:solidFill>
-          </a:ln>
-        </p:spPr>
-      </p:pic>
-    </p:spTree>
-    <p:extLst>
-      <p:ext uri="{BB962C8B-B14F-4D97-AF65-F5344CB8AC3E}">
-        <p14:creationId xmlns:p14="http://schemas.microsoft.com/office/powerpoint/2010/main" val="1682876296"/>
-      </p:ext>
-    </p:extLst>
-  </p:cSld>
-  <p:clrMapOvr>
-    <a:masterClrMapping/>
-  </p:clrMapOvr>
-</p:sld>
-</file>
-
-<file path=ppt/slides/slide5.xml><?xml version="1.0" encoding="utf-8"?>
 <p:sld xmlns:a="http://schemas.openxmlformats.org/drawingml/2006/main" xmlns:r="http://schemas.openxmlformats.org/officeDocument/2006/relationships" xmlns:p="http://schemas.openxmlformats.org/presentationml/2006/main">
   <p:cSld>
     <p:spTree>
@@ -5608,7 +5397,7 @@
 </p:sld>
 </file>
 
-<file path=ppt/slides/slide6.xml><?xml version="1.0" encoding="utf-8"?>
+<file path=ppt/slides/slide5.xml><?xml version="1.0" encoding="utf-8"?>
 <p:sld xmlns:a="http://schemas.openxmlformats.org/drawingml/2006/main" xmlns:r="http://schemas.openxmlformats.org/officeDocument/2006/relationships" xmlns:p="http://schemas.openxmlformats.org/presentationml/2006/main">
   <p:cSld>
     <p:spTree>
@@ -5840,6 +5629,120 @@
 </p:sld>
 </file>
 
+<file path=ppt/slides/slide6.xml><?xml version="1.0" encoding="utf-8"?>
+<p:sld xmlns:a="http://schemas.openxmlformats.org/drawingml/2006/main" xmlns:r="http://schemas.openxmlformats.org/officeDocument/2006/relationships" xmlns:p="http://schemas.openxmlformats.org/presentationml/2006/main">
+  <p:cSld>
+    <p:spTree>
+      <p:nvGrpSpPr>
+        <p:cNvPr id="1" name=""/>
+        <p:cNvGrpSpPr/>
+        <p:nvPr/>
+      </p:nvGrpSpPr>
+      <p:grpSpPr>
+        <a:xfrm>
+          <a:off x="0" y="0"/>
+          <a:ext cx="0" cy="0"/>
+          <a:chOff x="0" y="0"/>
+          <a:chExt cx="0" cy="0"/>
+        </a:xfrm>
+      </p:grpSpPr>
+      <p:sp>
+        <p:nvSpPr>
+          <p:cNvPr id="2" name="Title 1">
+            <a:extLst>
+              <a:ext uri="{FF2B5EF4-FFF2-40B4-BE49-F238E27FC236}">
+                <a16:creationId xmlns:a16="http://schemas.microsoft.com/office/drawing/2014/main" id="{38099223-8C60-72F1-74F3-EB0D74064A42}"/>
+              </a:ext>
+            </a:extLst>
+          </p:cNvPr>
+          <p:cNvSpPr>
+            <a:spLocks noGrp="1"/>
+          </p:cNvSpPr>
+          <p:nvPr>
+            <p:ph type="title"/>
+          </p:nvPr>
+        </p:nvSpPr>
+        <p:spPr/>
+        <p:txBody>
+          <a:bodyPr/>
+          <a:lstStyle/>
+          <a:p>
+            <a:r>
+              <a:rPr lang="en-US" dirty="0"/>
+              <a:t>Searching in Splunk - </a:t>
+            </a:r>
+            <a:r>
+              <a:rPr lang="en-AU" dirty="0"/>
+              <a:t>Tables</a:t>
+            </a:r>
+          </a:p>
+        </p:txBody>
+      </p:sp>
+      <p:sp>
+        <p:nvSpPr>
+          <p:cNvPr id="3" name="Content Placeholder 2">
+            <a:extLst>
+              <a:ext uri="{FF2B5EF4-FFF2-40B4-BE49-F238E27FC236}">
+                <a16:creationId xmlns:a16="http://schemas.microsoft.com/office/drawing/2014/main" id="{BC815DDB-ED52-D88A-9A32-FC81EB36DFD5}"/>
+              </a:ext>
+            </a:extLst>
+          </p:cNvPr>
+          <p:cNvSpPr>
+            <a:spLocks noGrp="1"/>
+          </p:cNvSpPr>
+          <p:nvPr>
+            <p:ph idx="1"/>
+          </p:nvPr>
+        </p:nvSpPr>
+        <p:spPr/>
+        <p:txBody>
+          <a:bodyPr/>
+          <a:lstStyle/>
+          <a:p>
+            <a:r>
+              <a:rPr lang="en-AU" dirty="0"/>
+              <a:t>Normal source types have too many fields to analyse at once. </a:t>
+            </a:r>
+          </a:p>
+          <a:p>
+            <a:pPr marL="0" indent="0">
+              <a:buNone/>
+            </a:pPr>
+            <a:endParaRPr lang="en-AU" dirty="0"/>
+          </a:p>
+          <a:p>
+            <a:r>
+              <a:rPr lang="en-AU" dirty="0"/>
+              <a:t>With the table function you are able to select which fields you want to view.</a:t>
+            </a:r>
+          </a:p>
+          <a:p>
+            <a:pPr marL="0" indent="0">
+              <a:buNone/>
+            </a:pPr>
+            <a:endParaRPr lang="en-AU" dirty="0"/>
+          </a:p>
+          <a:p>
+            <a:r>
+              <a:rPr lang="en-AU" dirty="0"/>
+              <a:t>Helpful when generating dashboards as you can select only the important fields.</a:t>
+            </a:r>
+          </a:p>
+        </p:txBody>
+      </p:sp>
+    </p:spTree>
+    <p:extLst>
+      <p:ext uri="{BB962C8B-B14F-4D97-AF65-F5344CB8AC3E}">
+        <p14:creationId xmlns:p14="http://schemas.microsoft.com/office/powerpoint/2010/main" val="2372391513"/>
+      </p:ext>
+    </p:extLst>
+  </p:cSld>
+  <p:clrMapOvr>
+    <a:masterClrMapping/>
+  </p:clrMapOvr>
+</p:sld>
+</file>
+
 <file path=ppt/slides/slide7.xml><?xml version="1.0" encoding="utf-8"?>
 <p:sld xmlns:a="http://schemas.openxmlformats.org/drawingml/2006/main" xmlns:r="http://schemas.openxmlformats.org/officeDocument/2006/relationships" xmlns:p="http://schemas.openxmlformats.org/presentationml/2006/main">
   <p:cSld>
@@ -5862,120 +5765,6 @@
           <p:cNvPr id="2" name="Title 1">
             <a:extLst>
               <a:ext uri="{FF2B5EF4-FFF2-40B4-BE49-F238E27FC236}">
-                <a16:creationId xmlns:a16="http://schemas.microsoft.com/office/drawing/2014/main" id="{38099223-8C60-72F1-74F3-EB0D74064A42}"/>
-              </a:ext>
-            </a:extLst>
-          </p:cNvPr>
-          <p:cNvSpPr>
-            <a:spLocks noGrp="1"/>
-          </p:cNvSpPr>
-          <p:nvPr>
-            <p:ph type="title"/>
-          </p:nvPr>
-        </p:nvSpPr>
-        <p:spPr/>
-        <p:txBody>
-          <a:bodyPr/>
-          <a:lstStyle/>
-          <a:p>
-            <a:r>
-              <a:rPr lang="en-US" dirty="0"/>
-              <a:t>Searching in Splunk - </a:t>
-            </a:r>
-            <a:r>
-              <a:rPr lang="en-AU" dirty="0"/>
-              <a:t>Tables</a:t>
-            </a:r>
-          </a:p>
-        </p:txBody>
-      </p:sp>
-      <p:sp>
-        <p:nvSpPr>
-          <p:cNvPr id="3" name="Content Placeholder 2">
-            <a:extLst>
-              <a:ext uri="{FF2B5EF4-FFF2-40B4-BE49-F238E27FC236}">
-                <a16:creationId xmlns:a16="http://schemas.microsoft.com/office/drawing/2014/main" id="{BC815DDB-ED52-D88A-9A32-FC81EB36DFD5}"/>
-              </a:ext>
-            </a:extLst>
-          </p:cNvPr>
-          <p:cNvSpPr>
-            <a:spLocks noGrp="1"/>
-          </p:cNvSpPr>
-          <p:nvPr>
-            <p:ph idx="1"/>
-          </p:nvPr>
-        </p:nvSpPr>
-        <p:spPr/>
-        <p:txBody>
-          <a:bodyPr/>
-          <a:lstStyle/>
-          <a:p>
-            <a:r>
-              <a:rPr lang="en-AU" dirty="0"/>
-              <a:t>Normal source types have too many fields to analyse at once. </a:t>
-            </a:r>
-          </a:p>
-          <a:p>
-            <a:pPr marL="0" indent="0">
-              <a:buNone/>
-            </a:pPr>
-            <a:endParaRPr lang="en-AU" dirty="0"/>
-          </a:p>
-          <a:p>
-            <a:r>
-              <a:rPr lang="en-AU" dirty="0"/>
-              <a:t>With the table function you are able to select which fields you want to view.</a:t>
-            </a:r>
-          </a:p>
-          <a:p>
-            <a:pPr marL="0" indent="0">
-              <a:buNone/>
-            </a:pPr>
-            <a:endParaRPr lang="en-AU" dirty="0"/>
-          </a:p>
-          <a:p>
-            <a:r>
-              <a:rPr lang="en-AU" dirty="0"/>
-              <a:t>Helpful when generating dashboards as you can select only the important fields.</a:t>
-            </a:r>
-          </a:p>
-        </p:txBody>
-      </p:sp>
-    </p:spTree>
-    <p:extLst>
-      <p:ext uri="{BB962C8B-B14F-4D97-AF65-F5344CB8AC3E}">
-        <p14:creationId xmlns:p14="http://schemas.microsoft.com/office/powerpoint/2010/main" val="2372391513"/>
-      </p:ext>
-    </p:extLst>
-  </p:cSld>
-  <p:clrMapOvr>
-    <a:masterClrMapping/>
-  </p:clrMapOvr>
-</p:sld>
-</file>
-
-<file path=ppt/slides/slide8.xml><?xml version="1.0" encoding="utf-8"?>
-<p:sld xmlns:a="http://schemas.openxmlformats.org/drawingml/2006/main" xmlns:r="http://schemas.openxmlformats.org/officeDocument/2006/relationships" xmlns:p="http://schemas.openxmlformats.org/presentationml/2006/main">
-  <p:cSld>
-    <p:spTree>
-      <p:nvGrpSpPr>
-        <p:cNvPr id="1" name=""/>
-        <p:cNvGrpSpPr/>
-        <p:nvPr/>
-      </p:nvGrpSpPr>
-      <p:grpSpPr>
-        <a:xfrm>
-          <a:off x="0" y="0"/>
-          <a:ext cx="0" cy="0"/>
-          <a:chOff x="0" y="0"/>
-          <a:chExt cx="0" cy="0"/>
-        </a:xfrm>
-      </p:grpSpPr>
-      <p:sp>
-        <p:nvSpPr>
-          <p:cNvPr id="2" name="Title 1">
-            <a:extLst>
-              <a:ext uri="{FF2B5EF4-FFF2-40B4-BE49-F238E27FC236}">
                 <a16:creationId xmlns:a16="http://schemas.microsoft.com/office/drawing/2014/main" id="{157AE698-46F7-3E5F-F52A-65B076596BD7}"/>
               </a:ext>
             </a:extLst>
@@ -6079,7 +5868,7 @@
 </p:sld>
 </file>
 
-<file path=ppt/slides/slide9.xml><?xml version="1.0" encoding="utf-8"?>
+<file path=ppt/slides/slide8.xml><?xml version="1.0" encoding="utf-8"?>
 <p:sld xmlns:a="http://schemas.openxmlformats.org/drawingml/2006/main" xmlns:r="http://schemas.openxmlformats.org/officeDocument/2006/relationships" xmlns:p="http://schemas.openxmlformats.org/presentationml/2006/main">
   <p:cSld>
     <p:spTree>
@@ -6197,6 +5986,126 @@
     <p:extLst>
       <p:ext uri="{BB962C8B-B14F-4D97-AF65-F5344CB8AC3E}">
         <p14:creationId xmlns:p14="http://schemas.microsoft.com/office/powerpoint/2010/main" val="3272005510"/>
+      </p:ext>
+    </p:extLst>
+  </p:cSld>
+  <p:clrMapOvr>
+    <a:masterClrMapping/>
+  </p:clrMapOvr>
+</p:sld>
+</file>
+
+<file path=ppt/slides/slide9.xml><?xml version="1.0" encoding="utf-8"?>
+<p:sld xmlns:a="http://schemas.openxmlformats.org/drawingml/2006/main" xmlns:r="http://schemas.openxmlformats.org/officeDocument/2006/relationships" xmlns:p="http://schemas.openxmlformats.org/presentationml/2006/main">
+  <p:cSld>
+    <p:spTree>
+      <p:nvGrpSpPr>
+        <p:cNvPr id="1" name=""/>
+        <p:cNvGrpSpPr/>
+        <p:nvPr/>
+      </p:nvGrpSpPr>
+      <p:grpSpPr>
+        <a:xfrm>
+          <a:off x="0" y="0"/>
+          <a:ext cx="0" cy="0"/>
+          <a:chOff x="0" y="0"/>
+          <a:chExt cx="0" cy="0"/>
+        </a:xfrm>
+      </p:grpSpPr>
+      <p:sp>
+        <p:nvSpPr>
+          <p:cNvPr id="2" name="Title 1">
+            <a:extLst>
+              <a:ext uri="{FF2B5EF4-FFF2-40B4-BE49-F238E27FC236}">
+                <a16:creationId xmlns:a16="http://schemas.microsoft.com/office/drawing/2014/main" id="{311C424B-4F60-03EA-57A9-C4318A90D1A8}"/>
+              </a:ext>
+            </a:extLst>
+          </p:cNvPr>
+          <p:cNvSpPr>
+            <a:spLocks noGrp="1"/>
+          </p:cNvSpPr>
+          <p:nvPr>
+            <p:ph type="title"/>
+          </p:nvPr>
+        </p:nvSpPr>
+        <p:spPr/>
+        <p:txBody>
+          <a:bodyPr/>
+          <a:lstStyle/>
+          <a:p>
+            <a:r>
+              <a:rPr lang="en-AU" dirty="0"/>
+              <a:t>Regex in </a:t>
+            </a:r>
+            <a:r>
+              <a:rPr lang="en-AU" dirty="0" err="1"/>
+              <a:t>splunk</a:t>
+            </a:r>
+            <a:endParaRPr lang="en-AU" dirty="0"/>
+          </a:p>
+        </p:txBody>
+      </p:sp>
+      <p:sp>
+        <p:nvSpPr>
+          <p:cNvPr id="3" name="Content Placeholder 2">
+            <a:extLst>
+              <a:ext uri="{FF2B5EF4-FFF2-40B4-BE49-F238E27FC236}">
+                <a16:creationId xmlns:a16="http://schemas.microsoft.com/office/drawing/2014/main" id="{0BE113D1-625D-E148-8A2F-8E8922728008}"/>
+              </a:ext>
+            </a:extLst>
+          </p:cNvPr>
+          <p:cNvSpPr>
+            <a:spLocks noGrp="1"/>
+          </p:cNvSpPr>
+          <p:nvPr>
+            <p:ph idx="1"/>
+          </p:nvPr>
+        </p:nvSpPr>
+        <p:spPr/>
+        <p:txBody>
+          <a:bodyPr/>
+          <a:lstStyle/>
+          <a:p>
+            <a:pPr marL="0" indent="0">
+              <a:buNone/>
+            </a:pPr>
+            <a:r>
+              <a:rPr lang="en-AU" dirty="0"/>
+              <a:t>Splunk allows you to extract your own fields through the use of regex.</a:t>
+            </a:r>
+          </a:p>
+          <a:p>
+            <a:pPr marL="0" indent="0">
+              <a:buNone/>
+            </a:pPr>
+            <a:r>
+              <a:rPr lang="en-AU" dirty="0"/>
+              <a:t>This can be useful if you want a field to contain specific events </a:t>
+            </a:r>
+            <a:r>
+              <a:rPr lang="en-AU" dirty="0" err="1"/>
+              <a:t>i.e</a:t>
+            </a:r>
+            <a:r>
+              <a:rPr lang="en-AU" dirty="0"/>
+              <a:t> usernames but one doesn’t exist currently. </a:t>
+            </a:r>
+          </a:p>
+          <a:p>
+            <a:endParaRPr lang="en-AU" dirty="0"/>
+          </a:p>
+          <a:p>
+            <a:pPr marL="0" indent="0">
+              <a:buNone/>
+            </a:pPr>
+            <a:endParaRPr lang="en-AU" dirty="0"/>
+          </a:p>
+        </p:txBody>
+      </p:sp>
+    </p:spTree>
+    <p:extLst>
+      <p:ext uri="{BB962C8B-B14F-4D97-AF65-F5344CB8AC3E}">
+        <p14:creationId xmlns:p14="http://schemas.microsoft.com/office/powerpoint/2010/main" val="2712621605"/>
       </p:ext>
     </p:extLst>
   </p:cSld>
